--- a/gyeongsan/GSJOB_4교시_자기소개서.pptx
+++ b/gyeongsan/GSJOB_4교시_자기소개서.pptx
@@ -3124,7 +3124,7 @@
             <a:avLst/>
           </a:prstGeom>
           <a:solidFill>
-            <a:srgbClr val="F1F4FC"/>
+            <a:srgbClr val="F1F7F5"/>
           </a:solidFill>
           <a:ln>
             <a:noFill/>
@@ -3184,7 +3184,7 @@
             <a:avLst/>
           </a:prstGeom>
           <a:solidFill>
-            <a:srgbClr val="F6F6F9"/>
+            <a:srgbClr val="F6F7F9"/>
           </a:solidFill>
           <a:ln>
             <a:noFill/>
@@ -3214,7 +3214,7 @@
             <a:avLst/>
           </a:prstGeom>
           <a:solidFill>
-            <a:srgbClr val="E8E9F0"/>
+            <a:srgbClr val="E8EBF0"/>
           </a:solidFill>
           <a:ln>
             <a:noFill/>
@@ -3244,7 +3244,7 @@
             <a:avLst/>
           </a:prstGeom>
           <a:solidFill>
-            <a:srgbClr val="EEF2FB"/>
+            <a:srgbClr val="EEF5F2"/>
           </a:solidFill>
           <a:ln>
             <a:noFill/>
@@ -3304,7 +3304,7 @@
             <a:avLst/>
           </a:prstGeom>
           <a:solidFill>
-            <a:srgbClr val="EDEDF3"/>
+            <a:srgbClr val="EDEFF3"/>
           </a:solidFill>
           <a:ln>
             <a:noFill/>
@@ -3334,7 +3334,7 @@
             <a:avLst/>
           </a:prstGeom>
           <a:solidFill>
-            <a:srgbClr val="E2E9F9"/>
+            <a:srgbClr val="E1EEE9"/>
           </a:solidFill>
           <a:ln>
             <a:noFill/>
@@ -3364,7 +3364,7 @@
             <a:avLst/>
           </a:prstGeom>
           <a:solidFill>
-            <a:srgbClr val="E8E9F0"/>
+            <a:srgbClr val="E8EBF0"/>
           </a:solidFill>
           <a:ln>
             <a:noFill/>
@@ -3394,7 +3394,7 @@
             <a:avLst/>
           </a:prstGeom>
           <a:solidFill>
-            <a:srgbClr val="1E2A6E"/>
+            <a:srgbClr val="1E3E69"/>
           </a:solidFill>
           <a:ln>
             <a:noFill/>
@@ -3439,7 +3439,7 @@
             <a:r>
               <a:rPr sz="2400" b="1" spc="120">
                 <a:solidFill>
-                  <a:srgbClr val="2457D6"/>
+                  <a:srgbClr val="1E7F5B"/>
                 </a:solidFill>
                 <a:latin typeface="Pretendard"/>
                 <a:ea typeface="Pretendard"/>
@@ -3480,7 +3480,7 @@
             <a:r>
               <a:rPr sz="6300" b="1" spc="-235">
                 <a:solidFill>
-                  <a:srgbClr val="1E2A6E"/>
+                  <a:srgbClr val="1E3E69"/>
                 </a:solidFill>
                 <a:latin typeface="Pretendard"/>
                 <a:ea typeface="Pretendard"/>
@@ -3498,7 +3498,7 @@
             <a:r>
               <a:rPr sz="6300" b="1" spc="-235">
                 <a:solidFill>
-                  <a:srgbClr val="1E2A6E"/>
+                  <a:srgbClr val="1E3E69"/>
                 </a:solidFill>
                 <a:latin typeface="Pretendard"/>
                 <a:ea typeface="Pretendard"/>
@@ -3642,7 +3642,7 @@
             <a:avLst/>
           </a:prstGeom>
           <a:solidFill>
-            <a:srgbClr val="F4F6FC"/>
+            <a:srgbClr val="F3F8F6"/>
           </a:solidFill>
           <a:ln>
             <a:noFill/>
@@ -3702,7 +3702,7 @@
             <a:avLst/>
           </a:prstGeom>
           <a:solidFill>
-            <a:srgbClr val="F8F8FA"/>
+            <a:srgbClr val="F8F9FA"/>
           </a:solidFill>
           <a:ln>
             <a:noFill/>
@@ -3747,7 +3747,7 @@
             <a:r>
               <a:rPr sz="1950" b="1" spc="160">
                 <a:solidFill>
-                  <a:srgbClr val="2457D6"/>
+                  <a:srgbClr val="1E7F5B"/>
                 </a:solidFill>
                 <a:latin typeface="Pretendard"/>
                 <a:ea typeface="Pretendard"/>
@@ -3788,7 +3788,7 @@
             <a:r>
               <a:rPr sz="5100" b="1">
                 <a:solidFill>
-                  <a:srgbClr val="1E2A6E"/>
+                  <a:srgbClr val="1E3E69"/>
                 </a:solidFill>
                 <a:latin typeface="Pretendard"/>
                 <a:ea typeface="Pretendard"/>
@@ -3814,7 +3814,7 @@
             <a:avLst/>
           </a:prstGeom>
           <a:solidFill>
-            <a:srgbClr val="1E2A6E"/>
+            <a:srgbClr val="1E3E69"/>
           </a:solidFill>
           <a:ln>
             <a:noFill/>
@@ -3844,7 +3844,7 @@
             <a:avLst/>
           </a:prstGeom>
           <a:solidFill>
-            <a:srgbClr val="1E2A6E"/>
+            <a:srgbClr val="1E3E69"/>
           </a:solidFill>
           <a:ln>
             <a:noFill/>
@@ -3915,7 +3915,7 @@
             <a:avLst/>
           </a:prstGeom>
           <a:solidFill>
-            <a:srgbClr val="2457D6"/>
+            <a:srgbClr val="1E7F5B"/>
           </a:solidFill>
           <a:ln>
             <a:noFill/>
@@ -3986,7 +3986,7 @@
             <a:avLst/>
           </a:prstGeom>
           <a:solidFill>
-            <a:srgbClr val="2457D6"/>
+            <a:srgbClr val="1E7F5B"/>
           </a:solidFill>
           <a:ln>
             <a:noFill/>
@@ -4059,11 +4059,11 @@
             </a:avLst>
           </a:prstGeom>
           <a:solidFill>
-            <a:srgbClr val="EAF0FF"/>
+            <a:srgbClr val="E6F4EE"/>
           </a:solidFill>
           <a:ln w="9525">
             <a:solidFill>
-              <a:srgbClr val="C9D7FF"/>
+              <a:srgbClr val="C3E6D8"/>
             </a:solidFill>
           </a:ln>
           <a:effectLst/>
@@ -4106,7 +4106,7 @@
             <a:r>
               <a:rPr sz="1875" b="1">
                 <a:solidFill>
-                  <a:srgbClr val="1E2A6E"/>
+                  <a:srgbClr val="1E3E69"/>
                 </a:solidFill>
                 <a:latin typeface="Pretendard"/>
                 <a:ea typeface="Pretendard"/>
@@ -4134,11 +4134,11 @@
             </a:avLst>
           </a:prstGeom>
           <a:solidFill>
-            <a:srgbClr val="F6F8FD"/>
+            <a:srgbClr val="F4F7FA"/>
           </a:solidFill>
           <a:ln w="9525">
             <a:solidFill>
-              <a:srgbClr val="DEE3F0"/>
+              <a:srgbClr val="D8E1EE"/>
             </a:solidFill>
           </a:ln>
           <a:effectLst/>
@@ -4209,11 +4209,11 @@
             </a:avLst>
           </a:prstGeom>
           <a:solidFill>
-            <a:srgbClr val="F6F8FD"/>
+            <a:srgbClr val="F4F7FA"/>
           </a:solidFill>
           <a:ln w="9525">
             <a:solidFill>
-              <a:srgbClr val="DEE3F0"/>
+              <a:srgbClr val="D8E1EE"/>
             </a:solidFill>
           </a:ln>
           <a:effectLst/>
@@ -4284,11 +4284,11 @@
             </a:avLst>
           </a:prstGeom>
           <a:solidFill>
-            <a:srgbClr val="EAF0FF"/>
+            <a:srgbClr val="E6F4EE"/>
           </a:solidFill>
           <a:ln w="9525">
             <a:solidFill>
-              <a:srgbClr val="C9D7FF"/>
+              <a:srgbClr val="C3E6D8"/>
             </a:solidFill>
           </a:ln>
           <a:effectLst/>
@@ -4331,7 +4331,7 @@
             <a:r>
               <a:rPr sz="1875" b="1">
                 <a:solidFill>
-                  <a:srgbClr val="1E2A6E"/>
+                  <a:srgbClr val="1E3E69"/>
                 </a:solidFill>
                 <a:latin typeface="Pretendard"/>
                 <a:ea typeface="Pretendard"/>
@@ -4359,11 +4359,11 @@
             </a:avLst>
           </a:prstGeom>
           <a:solidFill>
-            <a:srgbClr val="F6F8FD"/>
+            <a:srgbClr val="F4F7FA"/>
           </a:solidFill>
           <a:ln w="9525">
             <a:solidFill>
-              <a:srgbClr val="DEE3F0"/>
+              <a:srgbClr val="D8E1EE"/>
             </a:solidFill>
           </a:ln>
           <a:effectLst/>
@@ -4434,11 +4434,11 @@
             </a:avLst>
           </a:prstGeom>
           <a:solidFill>
-            <a:srgbClr val="F6F8FD"/>
+            <a:srgbClr val="F4F7FA"/>
           </a:solidFill>
           <a:ln w="9525">
             <a:solidFill>
-              <a:srgbClr val="DEE3F0"/>
+              <a:srgbClr val="D8E1EE"/>
             </a:solidFill>
           </a:ln>
           <a:effectLst/>
@@ -4509,11 +4509,11 @@
             </a:avLst>
           </a:prstGeom>
           <a:solidFill>
-            <a:srgbClr val="EAF0FF"/>
+            <a:srgbClr val="E6F4EE"/>
           </a:solidFill>
           <a:ln w="9525">
             <a:solidFill>
-              <a:srgbClr val="C9D7FF"/>
+              <a:srgbClr val="C3E6D8"/>
             </a:solidFill>
           </a:ln>
           <a:effectLst/>
@@ -4556,7 +4556,7 @@
             <a:r>
               <a:rPr sz="1875" b="1">
                 <a:solidFill>
-                  <a:srgbClr val="1E2A6E"/>
+                  <a:srgbClr val="1E3E69"/>
                 </a:solidFill>
                 <a:latin typeface="Pretendard"/>
                 <a:ea typeface="Pretendard"/>
@@ -4584,11 +4584,11 @@
             </a:avLst>
           </a:prstGeom>
           <a:solidFill>
-            <a:srgbClr val="F6F8FD"/>
+            <a:srgbClr val="F4F7FA"/>
           </a:solidFill>
           <a:ln w="9525">
             <a:solidFill>
-              <a:srgbClr val="DEE3F0"/>
+              <a:srgbClr val="D8E1EE"/>
             </a:solidFill>
           </a:ln>
           <a:effectLst/>
@@ -4659,11 +4659,11 @@
             </a:avLst>
           </a:prstGeom>
           <a:solidFill>
-            <a:srgbClr val="F6F8FD"/>
+            <a:srgbClr val="F4F7FA"/>
           </a:solidFill>
           <a:ln w="9525">
             <a:solidFill>
-              <a:srgbClr val="DEE3F0"/>
+              <a:srgbClr val="D8E1EE"/>
             </a:solidFill>
           </a:ln>
           <a:effectLst/>
@@ -4734,11 +4734,11 @@
             </a:avLst>
           </a:prstGeom>
           <a:solidFill>
-            <a:srgbClr val="EAF0FF"/>
+            <a:srgbClr val="E6F4EE"/>
           </a:solidFill>
           <a:ln w="9525">
             <a:solidFill>
-              <a:srgbClr val="C9D7FF"/>
+              <a:srgbClr val="C3E6D8"/>
             </a:solidFill>
           </a:ln>
           <a:effectLst/>
@@ -4781,7 +4781,7 @@
             <a:r>
               <a:rPr sz="1875" b="1">
                 <a:solidFill>
-                  <a:srgbClr val="1E2A6E"/>
+                  <a:srgbClr val="1E3E69"/>
                 </a:solidFill>
                 <a:latin typeface="Pretendard"/>
                 <a:ea typeface="Pretendard"/>
@@ -4809,11 +4809,11 @@
             </a:avLst>
           </a:prstGeom>
           <a:solidFill>
-            <a:srgbClr val="F6F8FD"/>
+            <a:srgbClr val="F4F7FA"/>
           </a:solidFill>
           <a:ln w="9525">
             <a:solidFill>
-              <a:srgbClr val="DEE3F0"/>
+              <a:srgbClr val="D8E1EE"/>
             </a:solidFill>
           </a:ln>
           <a:effectLst/>
@@ -4884,11 +4884,11 @@
             </a:avLst>
           </a:prstGeom>
           <a:solidFill>
-            <a:srgbClr val="F6F8FD"/>
+            <a:srgbClr val="F4F7FA"/>
           </a:solidFill>
           <a:ln w="9525">
             <a:solidFill>
-              <a:srgbClr val="DEE3F0"/>
+              <a:srgbClr val="D8E1EE"/>
             </a:solidFill>
           </a:ln>
           <a:effectLst/>
@@ -4959,11 +4959,11 @@
             </a:avLst>
           </a:prstGeom>
           <a:solidFill>
-            <a:srgbClr val="EAF0FF"/>
+            <a:srgbClr val="E6F4EE"/>
           </a:solidFill>
           <a:ln w="9525">
             <a:solidFill>
-              <a:srgbClr val="C9D7FF"/>
+              <a:srgbClr val="C3E6D8"/>
             </a:solidFill>
           </a:ln>
           <a:effectLst/>
@@ -5006,7 +5006,7 @@
             <a:r>
               <a:rPr sz="1875" b="1">
                 <a:solidFill>
-                  <a:srgbClr val="1E2A6E"/>
+                  <a:srgbClr val="1E3E69"/>
                 </a:solidFill>
                 <a:latin typeface="Pretendard"/>
                 <a:ea typeface="Pretendard"/>
@@ -5034,11 +5034,11 @@
             </a:avLst>
           </a:prstGeom>
           <a:solidFill>
-            <a:srgbClr val="F6F8FD"/>
+            <a:srgbClr val="F4F7FA"/>
           </a:solidFill>
           <a:ln w="9525">
             <a:solidFill>
-              <a:srgbClr val="DEE3F0"/>
+              <a:srgbClr val="D8E1EE"/>
             </a:solidFill>
           </a:ln>
           <a:effectLst/>
@@ -5109,11 +5109,11 @@
             </a:avLst>
           </a:prstGeom>
           <a:solidFill>
-            <a:srgbClr val="F6F8FD"/>
+            <a:srgbClr val="F4F7FA"/>
           </a:solidFill>
           <a:ln w="9525">
             <a:solidFill>
-              <a:srgbClr val="DEE3F0"/>
+              <a:srgbClr val="D8E1EE"/>
             </a:solidFill>
           </a:ln>
           <a:effectLst/>
@@ -5223,7 +5223,7 @@
             <a:avLst/>
           </a:prstGeom>
           <a:solidFill>
-            <a:srgbClr val="DEE3F0"/>
+            <a:srgbClr val="D8E1EE"/>
           </a:solidFill>
           <a:ln>
             <a:noFill/>
@@ -5353,7 +5353,7 @@
             <a:avLst/>
           </a:prstGeom>
           <a:solidFill>
-            <a:srgbClr val="F4F6FC"/>
+            <a:srgbClr val="F3F8F6"/>
           </a:solidFill>
           <a:ln>
             <a:noFill/>
@@ -5413,7 +5413,7 @@
             <a:avLst/>
           </a:prstGeom>
           <a:solidFill>
-            <a:srgbClr val="F8F8FA"/>
+            <a:srgbClr val="F8F9FA"/>
           </a:solidFill>
           <a:ln>
             <a:noFill/>
@@ -5445,7 +5445,7 @@
             </a:avLst>
           </a:prstGeom>
           <a:solidFill>
-            <a:srgbClr val="2457D6"/>
+            <a:srgbClr val="1E7F5B"/>
           </a:solidFill>
           <a:ln>
             <a:noFill/>
@@ -5561,7 +5561,7 @@
             <a:r>
               <a:rPr sz="1950" b="1" spc="160">
                 <a:solidFill>
-                  <a:srgbClr val="2457D6"/>
+                  <a:srgbClr val="1E7F5B"/>
                 </a:solidFill>
                 <a:latin typeface="Pretendard"/>
                 <a:ea typeface="Pretendard"/>
@@ -5602,7 +5602,7 @@
             <a:r>
               <a:rPr sz="5100" b="1">
                 <a:solidFill>
-                  <a:srgbClr val="1E2A6E"/>
+                  <a:srgbClr val="1E3E69"/>
                 </a:solidFill>
                 <a:latin typeface="Pretendard"/>
                 <a:ea typeface="Pretendard"/>
@@ -5628,7 +5628,7 @@
             <a:avLst/>
           </a:prstGeom>
           <a:solidFill>
-            <a:srgbClr val="1E2A6E"/>
+            <a:srgbClr val="1E3E69"/>
           </a:solidFill>
           <a:ln>
             <a:noFill/>
@@ -5673,7 +5673,7 @@
             <a:r>
               <a:rPr sz="2250" b="1">
                 <a:solidFill>
-                  <a:srgbClr val="2457D6"/>
+                  <a:srgbClr val="1E7F5B"/>
                 </a:solidFill>
                 <a:latin typeface="Pretendard"/>
                 <a:ea typeface="Pretendard"/>
@@ -5701,11 +5701,11 @@
             </a:avLst>
           </a:prstGeom>
           <a:solidFill>
-            <a:srgbClr val="F6F8FD"/>
+            <a:srgbClr val="F4F7FA"/>
           </a:solidFill>
           <a:ln w="9525">
             <a:solidFill>
-              <a:srgbClr val="DEE3F0"/>
+              <a:srgbClr val="D8E1EE"/>
             </a:solidFill>
           </a:ln>
           <a:effectLst/>
@@ -5733,7 +5733,7 @@
             <a:avLst/>
           </a:prstGeom>
           <a:solidFill>
-            <a:srgbClr val="1E2A6E"/>
+            <a:srgbClr val="1E3E69"/>
           </a:solidFill>
           <a:ln>
             <a:noFill/>
@@ -5819,7 +5819,7 @@
             <a:r>
               <a:rPr sz="2700" b="1">
                 <a:solidFill>
-                  <a:srgbClr val="1E2A6E"/>
+                  <a:srgbClr val="1E3E69"/>
                 </a:solidFill>
                 <a:latin typeface="Pretendard"/>
                 <a:ea typeface="Pretendard"/>
@@ -5845,7 +5845,7 @@
             <a:avLst/>
           </a:prstGeom>
           <a:solidFill>
-            <a:srgbClr val="2457D6"/>
+            <a:srgbClr val="1E7F5B"/>
           </a:solidFill>
           <a:ln>
             <a:noFill/>
@@ -5890,7 +5890,7 @@
             <a:r>
               <a:rPr sz="1875" b="1" spc="150">
                 <a:solidFill>
-                  <a:srgbClr val="2457D6"/>
+                  <a:srgbClr val="1E7F5B"/>
                 </a:solidFill>
                 <a:latin typeface="Pretendard"/>
                 <a:ea typeface="Pretendard"/>
@@ -5931,7 +5931,7 @@
             <a:r>
               <a:rPr sz="2475" b="1">
                 <a:solidFill>
-                  <a:srgbClr val="1E2A6E"/>
+                  <a:srgbClr val="1E3E69"/>
                 </a:solidFill>
                 <a:latin typeface="Pretendard"/>
                 <a:ea typeface="Pretendard"/>
@@ -5957,7 +5957,7 @@
             <a:avLst/>
           </a:prstGeom>
           <a:solidFill>
-            <a:srgbClr val="DEE3F0"/>
+            <a:srgbClr val="D8E1EE"/>
           </a:solidFill>
           <a:ln>
             <a:noFill/>
@@ -6087,7 +6087,7 @@
             <a:avLst/>
           </a:prstGeom>
           <a:solidFill>
-            <a:srgbClr val="F4F6FC"/>
+            <a:srgbClr val="F3F8F6"/>
           </a:solidFill>
           <a:ln>
             <a:noFill/>
@@ -6147,7 +6147,7 @@
             <a:avLst/>
           </a:prstGeom>
           <a:solidFill>
-            <a:srgbClr val="F8F8FA"/>
+            <a:srgbClr val="F8F9FA"/>
           </a:solidFill>
           <a:ln>
             <a:noFill/>
@@ -6192,7 +6192,7 @@
             <a:r>
               <a:rPr sz="1950" b="1" spc="160">
                 <a:solidFill>
-                  <a:srgbClr val="2457D6"/>
+                  <a:srgbClr val="1E7F5B"/>
                 </a:solidFill>
                 <a:latin typeface="Pretendard"/>
                 <a:ea typeface="Pretendard"/>
@@ -6233,7 +6233,7 @@
             <a:r>
               <a:rPr sz="5100" b="1">
                 <a:solidFill>
-                  <a:srgbClr val="1E2A6E"/>
+                  <a:srgbClr val="1E3E69"/>
                 </a:solidFill>
                 <a:latin typeface="Pretendard"/>
                 <a:ea typeface="Pretendard"/>
@@ -6259,7 +6259,7 @@
             <a:avLst/>
           </a:prstGeom>
           <a:solidFill>
-            <a:srgbClr val="1E2A6E"/>
+            <a:srgbClr val="1E3E69"/>
           </a:solidFill>
           <a:ln>
             <a:noFill/>
@@ -6304,7 +6304,7 @@
             <a:r>
               <a:rPr sz="3150" b="1">
                 <a:solidFill>
-                  <a:srgbClr val="1E2A6E"/>
+                  <a:srgbClr val="1E3E69"/>
                 </a:solidFill>
                 <a:latin typeface="Pretendard"/>
                 <a:ea typeface="Pretendard"/>
@@ -6373,11 +6373,11 @@
             </a:avLst>
           </a:prstGeom>
           <a:solidFill>
-            <a:srgbClr val="F6F8FD"/>
+            <a:srgbClr val="F4F7FA"/>
           </a:solidFill>
           <a:ln w="9525">
             <a:solidFill>
-              <a:srgbClr val="DEE3F0"/>
+              <a:srgbClr val="D8E1EE"/>
             </a:solidFill>
           </a:ln>
           <a:effectLst/>
@@ -6405,7 +6405,7 @@
             <a:avLst/>
           </a:prstGeom>
           <a:solidFill>
-            <a:srgbClr val="2457D6"/>
+            <a:srgbClr val="1E7F5B"/>
           </a:solidFill>
           <a:ln>
             <a:noFill/>
@@ -6476,7 +6476,7 @@
             <a:avLst/>
           </a:prstGeom>
           <a:solidFill>
-            <a:srgbClr val="2457D6"/>
+            <a:srgbClr val="1E7F5B"/>
           </a:solidFill>
           <a:ln>
             <a:noFill/>
@@ -6547,7 +6547,7 @@
             <a:avLst/>
           </a:prstGeom>
           <a:solidFill>
-            <a:srgbClr val="2457D6"/>
+            <a:srgbClr val="1E7F5B"/>
           </a:solidFill>
           <a:ln>
             <a:noFill/>
@@ -6633,7 +6633,7 @@
             <a:r>
               <a:rPr sz="3150" b="1">
                 <a:solidFill>
-                  <a:srgbClr val="1E2A6E"/>
+                  <a:srgbClr val="1E3E69"/>
                 </a:solidFill>
                 <a:latin typeface="Pretendard"/>
                 <a:ea typeface="Pretendard"/>
@@ -6702,11 +6702,11 @@
             </a:avLst>
           </a:prstGeom>
           <a:solidFill>
-            <a:srgbClr val="F6F8FD"/>
+            <a:srgbClr val="F4F7FA"/>
           </a:solidFill>
           <a:ln w="9525">
             <a:solidFill>
-              <a:srgbClr val="DEE3F0"/>
+              <a:srgbClr val="D8E1EE"/>
             </a:solidFill>
           </a:ln>
           <a:effectLst/>
@@ -6734,7 +6734,7 @@
             <a:avLst/>
           </a:prstGeom>
           <a:solidFill>
-            <a:srgbClr val="2457D6"/>
+            <a:srgbClr val="1E7F5B"/>
           </a:solidFill>
           <a:ln>
             <a:noFill/>
@@ -6805,7 +6805,7 @@
             <a:avLst/>
           </a:prstGeom>
           <a:solidFill>
-            <a:srgbClr val="2457D6"/>
+            <a:srgbClr val="1E7F5B"/>
           </a:solidFill>
           <a:ln>
             <a:noFill/>
@@ -6876,7 +6876,7 @@
             <a:avLst/>
           </a:prstGeom>
           <a:solidFill>
-            <a:srgbClr val="2457D6"/>
+            <a:srgbClr val="1E7F5B"/>
           </a:solidFill>
           <a:ln>
             <a:noFill/>
@@ -6947,7 +6947,7 @@
             <a:avLst/>
           </a:prstGeom>
           <a:solidFill>
-            <a:srgbClr val="1E2A6E"/>
+            <a:srgbClr val="1E3E69"/>
           </a:solidFill>
           <a:ln>
             <a:noFill/>
@@ -7018,7 +7018,7 @@
             <a:avLst/>
           </a:prstGeom>
           <a:solidFill>
-            <a:srgbClr val="DEE3F0"/>
+            <a:srgbClr val="D8E1EE"/>
           </a:solidFill>
           <a:ln>
             <a:noFill/>
@@ -7148,7 +7148,7 @@
             <a:avLst/>
           </a:prstGeom>
           <a:solidFill>
-            <a:srgbClr val="F4F6FC"/>
+            <a:srgbClr val="F3F8F6"/>
           </a:solidFill>
           <a:ln>
             <a:noFill/>
@@ -7178,7 +7178,7 @@
             <a:avLst/>
           </a:prstGeom>
           <a:solidFill>
-            <a:srgbClr val="F6F6F9"/>
+            <a:srgbClr val="F6F7F9"/>
           </a:solidFill>
           <a:ln>
             <a:noFill/>
@@ -7208,7 +7208,7 @@
             <a:avLst/>
           </a:prstGeom>
           <a:solidFill>
-            <a:srgbClr val="1E2A6E"/>
+            <a:srgbClr val="1E3E69"/>
           </a:solidFill>
           <a:ln>
             <a:noFill/>
@@ -7253,7 +7253,7 @@
             <a:r>
               <a:rPr sz="2400" b="1">
                 <a:solidFill>
-                  <a:srgbClr val="2457D6"/>
+                  <a:srgbClr val="1E7F5B"/>
                 </a:solidFill>
                 <a:latin typeface="Pretendard"/>
                 <a:ea typeface="Pretendard"/>
@@ -7294,7 +7294,7 @@
             <a:r>
               <a:rPr sz="6600" b="1">
                 <a:solidFill>
-                  <a:srgbClr val="1E2A6E"/>
+                  <a:srgbClr val="1E3E69"/>
                 </a:solidFill>
                 <a:latin typeface="Pretendard"/>
                 <a:ea typeface="Pretendard"/>
@@ -7361,7 +7361,7 @@
             <a:avLst/>
           </a:prstGeom>
           <a:solidFill>
-            <a:srgbClr val="DEE3F0"/>
+            <a:srgbClr val="D8E1EE"/>
           </a:solidFill>
           <a:ln>
             <a:noFill/>
@@ -7491,7 +7491,7 @@
             <a:avLst/>
           </a:prstGeom>
           <a:solidFill>
-            <a:srgbClr val="F4F6FC"/>
+            <a:srgbClr val="F3F8F6"/>
           </a:solidFill>
           <a:ln>
             <a:noFill/>
@@ -7551,7 +7551,7 @@
             <a:avLst/>
           </a:prstGeom>
           <a:solidFill>
-            <a:srgbClr val="F8F8FA"/>
+            <a:srgbClr val="F8F9FA"/>
           </a:solidFill>
           <a:ln>
             <a:noFill/>
@@ -7596,7 +7596,7 @@
             <a:r>
               <a:rPr sz="1950" b="1" spc="160">
                 <a:solidFill>
-                  <a:srgbClr val="2457D6"/>
+                  <a:srgbClr val="1E7F5B"/>
                 </a:solidFill>
                 <a:latin typeface="Pretendard"/>
                 <a:ea typeface="Pretendard"/>
@@ -7637,7 +7637,7 @@
             <a:r>
               <a:rPr sz="5100" b="1">
                 <a:solidFill>
-                  <a:srgbClr val="1E2A6E"/>
+                  <a:srgbClr val="1E3E69"/>
                 </a:solidFill>
                 <a:latin typeface="Pretendard"/>
                 <a:ea typeface="Pretendard"/>
@@ -7663,7 +7663,7 @@
             <a:avLst/>
           </a:prstGeom>
           <a:solidFill>
-            <a:srgbClr val="1E2A6E"/>
+            <a:srgbClr val="1E3E69"/>
           </a:solidFill>
           <a:ln>
             <a:noFill/>
@@ -7693,7 +7693,7 @@
             <a:avLst/>
           </a:prstGeom>
           <a:solidFill>
-            <a:srgbClr val="1E2A6E"/>
+            <a:srgbClr val="1E3E69"/>
           </a:solidFill>
           <a:ln>
             <a:noFill/>
@@ -7764,7 +7764,7 @@
             <a:avLst/>
           </a:prstGeom>
           <a:solidFill>
-            <a:srgbClr val="2457D6"/>
+            <a:srgbClr val="1E7F5B"/>
           </a:solidFill>
           <a:ln>
             <a:noFill/>
@@ -7835,7 +7835,7 @@
             <a:avLst/>
           </a:prstGeom>
           <a:solidFill>
-            <a:srgbClr val="2457D6"/>
+            <a:srgbClr val="1E7F5B"/>
           </a:solidFill>
           <a:ln>
             <a:noFill/>
@@ -7908,11 +7908,11 @@
             </a:avLst>
           </a:prstGeom>
           <a:solidFill>
-            <a:srgbClr val="EAF0FF"/>
+            <a:srgbClr val="E6F4EE"/>
           </a:solidFill>
           <a:ln w="9525">
             <a:solidFill>
-              <a:srgbClr val="C9D7FF"/>
+              <a:srgbClr val="C3E6D8"/>
             </a:solidFill>
           </a:ln>
           <a:effectLst/>
@@ -7955,7 +7955,7 @@
             <a:r>
               <a:rPr sz="1875" b="1">
                 <a:solidFill>
-                  <a:srgbClr val="1E2A6E"/>
+                  <a:srgbClr val="1E3E69"/>
                 </a:solidFill>
                 <a:latin typeface="Pretendard"/>
                 <a:ea typeface="Pretendard"/>
@@ -7983,11 +7983,11 @@
             </a:avLst>
           </a:prstGeom>
           <a:solidFill>
-            <a:srgbClr val="F6F8FD"/>
+            <a:srgbClr val="F4F7FA"/>
           </a:solidFill>
           <a:ln w="9525">
             <a:solidFill>
-              <a:srgbClr val="DEE3F0"/>
+              <a:srgbClr val="D8E1EE"/>
             </a:solidFill>
           </a:ln>
           <a:effectLst/>
@@ -8058,11 +8058,11 @@
             </a:avLst>
           </a:prstGeom>
           <a:solidFill>
-            <a:srgbClr val="F6F8FD"/>
+            <a:srgbClr val="F4F7FA"/>
           </a:solidFill>
           <a:ln w="9525">
             <a:solidFill>
-              <a:srgbClr val="DEE3F0"/>
+              <a:srgbClr val="D8E1EE"/>
             </a:solidFill>
           </a:ln>
           <a:effectLst/>
@@ -8133,11 +8133,11 @@
             </a:avLst>
           </a:prstGeom>
           <a:solidFill>
-            <a:srgbClr val="EAF0FF"/>
+            <a:srgbClr val="E6F4EE"/>
           </a:solidFill>
           <a:ln w="9525">
             <a:solidFill>
-              <a:srgbClr val="C9D7FF"/>
+              <a:srgbClr val="C3E6D8"/>
             </a:solidFill>
           </a:ln>
           <a:effectLst/>
@@ -8180,7 +8180,7 @@
             <a:r>
               <a:rPr sz="1875" b="1">
                 <a:solidFill>
-                  <a:srgbClr val="1E2A6E"/>
+                  <a:srgbClr val="1E3E69"/>
                 </a:solidFill>
                 <a:latin typeface="Pretendard"/>
                 <a:ea typeface="Pretendard"/>
@@ -8208,11 +8208,11 @@
             </a:avLst>
           </a:prstGeom>
           <a:solidFill>
-            <a:srgbClr val="F6F8FD"/>
+            <a:srgbClr val="F4F7FA"/>
           </a:solidFill>
           <a:ln w="9525">
             <a:solidFill>
-              <a:srgbClr val="DEE3F0"/>
+              <a:srgbClr val="D8E1EE"/>
             </a:solidFill>
           </a:ln>
           <a:effectLst/>
@@ -8283,11 +8283,11 @@
             </a:avLst>
           </a:prstGeom>
           <a:solidFill>
-            <a:srgbClr val="F6F8FD"/>
+            <a:srgbClr val="F4F7FA"/>
           </a:solidFill>
           <a:ln w="9525">
             <a:solidFill>
-              <a:srgbClr val="DEE3F0"/>
+              <a:srgbClr val="D8E1EE"/>
             </a:solidFill>
           </a:ln>
           <a:effectLst/>
@@ -8358,11 +8358,11 @@
             </a:avLst>
           </a:prstGeom>
           <a:solidFill>
-            <a:srgbClr val="EAF0FF"/>
+            <a:srgbClr val="E6F4EE"/>
           </a:solidFill>
           <a:ln w="9525">
             <a:solidFill>
-              <a:srgbClr val="C9D7FF"/>
+              <a:srgbClr val="C3E6D8"/>
             </a:solidFill>
           </a:ln>
           <a:effectLst/>
@@ -8405,7 +8405,7 @@
             <a:r>
               <a:rPr sz="1875" b="1">
                 <a:solidFill>
-                  <a:srgbClr val="1E2A6E"/>
+                  <a:srgbClr val="1E3E69"/>
                 </a:solidFill>
                 <a:latin typeface="Pretendard"/>
                 <a:ea typeface="Pretendard"/>
@@ -8433,11 +8433,11 @@
             </a:avLst>
           </a:prstGeom>
           <a:solidFill>
-            <a:srgbClr val="F6F8FD"/>
+            <a:srgbClr val="F4F7FA"/>
           </a:solidFill>
           <a:ln w="9525">
             <a:solidFill>
-              <a:srgbClr val="DEE3F0"/>
+              <a:srgbClr val="D8E1EE"/>
             </a:solidFill>
           </a:ln>
           <a:effectLst/>
@@ -8508,11 +8508,11 @@
             </a:avLst>
           </a:prstGeom>
           <a:solidFill>
-            <a:srgbClr val="F6F8FD"/>
+            <a:srgbClr val="F4F7FA"/>
           </a:solidFill>
           <a:ln w="9525">
             <a:solidFill>
-              <a:srgbClr val="DEE3F0"/>
+              <a:srgbClr val="D8E1EE"/>
             </a:solidFill>
           </a:ln>
           <a:effectLst/>
@@ -8583,11 +8583,11 @@
             </a:avLst>
           </a:prstGeom>
           <a:solidFill>
-            <a:srgbClr val="EAF0FF"/>
+            <a:srgbClr val="E6F4EE"/>
           </a:solidFill>
           <a:ln w="9525">
             <a:solidFill>
-              <a:srgbClr val="C9D7FF"/>
+              <a:srgbClr val="C3E6D8"/>
             </a:solidFill>
           </a:ln>
           <a:effectLst/>
@@ -8630,7 +8630,7 @@
             <a:r>
               <a:rPr sz="1875" b="1">
                 <a:solidFill>
-                  <a:srgbClr val="1E2A6E"/>
+                  <a:srgbClr val="1E3E69"/>
                 </a:solidFill>
                 <a:latin typeface="Pretendard"/>
                 <a:ea typeface="Pretendard"/>
@@ -8658,11 +8658,11 @@
             </a:avLst>
           </a:prstGeom>
           <a:solidFill>
-            <a:srgbClr val="F6F8FD"/>
+            <a:srgbClr val="F4F7FA"/>
           </a:solidFill>
           <a:ln w="9525">
             <a:solidFill>
-              <a:srgbClr val="DEE3F0"/>
+              <a:srgbClr val="D8E1EE"/>
             </a:solidFill>
           </a:ln>
           <a:effectLst/>
@@ -8733,11 +8733,11 @@
             </a:avLst>
           </a:prstGeom>
           <a:solidFill>
-            <a:srgbClr val="F6F8FD"/>
+            <a:srgbClr val="F4F7FA"/>
           </a:solidFill>
           <a:ln w="9525">
             <a:solidFill>
-              <a:srgbClr val="DEE3F0"/>
+              <a:srgbClr val="D8E1EE"/>
             </a:solidFill>
           </a:ln>
           <a:effectLst/>
@@ -8847,7 +8847,7 @@
             <a:avLst/>
           </a:prstGeom>
           <a:solidFill>
-            <a:srgbClr val="DEE3F0"/>
+            <a:srgbClr val="D8E1EE"/>
           </a:solidFill>
           <a:ln>
             <a:noFill/>
@@ -8977,7 +8977,7 @@
             <a:avLst/>
           </a:prstGeom>
           <a:solidFill>
-            <a:srgbClr val="F4F6FC"/>
+            <a:srgbClr val="F3F8F6"/>
           </a:solidFill>
           <a:ln>
             <a:noFill/>
@@ -9037,7 +9037,7 @@
             <a:avLst/>
           </a:prstGeom>
           <a:solidFill>
-            <a:srgbClr val="F8F8FA"/>
+            <a:srgbClr val="F8F9FA"/>
           </a:solidFill>
           <a:ln>
             <a:noFill/>
@@ -9069,7 +9069,7 @@
             </a:avLst>
           </a:prstGeom>
           <a:solidFill>
-            <a:srgbClr val="2457D6"/>
+            <a:srgbClr val="1E7F5B"/>
           </a:solidFill>
           <a:ln>
             <a:noFill/>
@@ -9185,7 +9185,7 @@
             <a:r>
               <a:rPr sz="1950" b="1" spc="160">
                 <a:solidFill>
-                  <a:srgbClr val="2457D6"/>
+                  <a:srgbClr val="1E7F5B"/>
                 </a:solidFill>
                 <a:latin typeface="Pretendard"/>
                 <a:ea typeface="Pretendard"/>
@@ -9226,7 +9226,7 @@
             <a:r>
               <a:rPr sz="5100" b="1">
                 <a:solidFill>
-                  <a:srgbClr val="1E2A6E"/>
+                  <a:srgbClr val="1E3E69"/>
                 </a:solidFill>
                 <a:latin typeface="Pretendard"/>
                 <a:ea typeface="Pretendard"/>
@@ -9252,7 +9252,7 @@
             <a:avLst/>
           </a:prstGeom>
           <a:solidFill>
-            <a:srgbClr val="1E2A6E"/>
+            <a:srgbClr val="1E3E69"/>
           </a:solidFill>
           <a:ln>
             <a:noFill/>
@@ -9297,7 +9297,7 @@
             <a:r>
               <a:rPr sz="2250" b="1">
                 <a:solidFill>
-                  <a:srgbClr val="2457D6"/>
+                  <a:srgbClr val="1E7F5B"/>
                 </a:solidFill>
                 <a:latin typeface="Pretendard"/>
                 <a:ea typeface="Pretendard"/>
@@ -9325,11 +9325,11 @@
             </a:avLst>
           </a:prstGeom>
           <a:solidFill>
-            <a:srgbClr val="F6F8FD"/>
+            <a:srgbClr val="F4F7FA"/>
           </a:solidFill>
           <a:ln w="9525">
             <a:solidFill>
-              <a:srgbClr val="DEE3F0"/>
+              <a:srgbClr val="D8E1EE"/>
             </a:solidFill>
           </a:ln>
           <a:effectLst/>
@@ -9357,7 +9357,7 @@
             <a:avLst/>
           </a:prstGeom>
           <a:solidFill>
-            <a:srgbClr val="1E2A6E"/>
+            <a:srgbClr val="1E3E69"/>
           </a:solidFill>
           <a:ln>
             <a:noFill/>
@@ -9443,7 +9443,7 @@
             <a:r>
               <a:rPr sz="2700" b="1">
                 <a:solidFill>
-                  <a:srgbClr val="1E2A6E"/>
+                  <a:srgbClr val="1E3E69"/>
                 </a:solidFill>
                 <a:latin typeface="Pretendard"/>
                 <a:ea typeface="Pretendard"/>
@@ -9469,7 +9469,7 @@
             <a:avLst/>
           </a:prstGeom>
           <a:solidFill>
-            <a:srgbClr val="2457D6"/>
+            <a:srgbClr val="1E7F5B"/>
           </a:solidFill>
           <a:ln>
             <a:noFill/>
@@ -9514,7 +9514,7 @@
             <a:r>
               <a:rPr sz="1875" b="1" spc="150">
                 <a:solidFill>
-                  <a:srgbClr val="2457D6"/>
+                  <a:srgbClr val="1E7F5B"/>
                 </a:solidFill>
                 <a:latin typeface="Pretendard"/>
                 <a:ea typeface="Pretendard"/>
@@ -9555,7 +9555,7 @@
             <a:r>
               <a:rPr sz="2475" b="1">
                 <a:solidFill>
-                  <a:srgbClr val="1E2A6E"/>
+                  <a:srgbClr val="1E3E69"/>
                 </a:solidFill>
                 <a:latin typeface="Pretendard"/>
                 <a:ea typeface="Pretendard"/>
@@ -9581,7 +9581,7 @@
             <a:avLst/>
           </a:prstGeom>
           <a:solidFill>
-            <a:srgbClr val="DEE3F0"/>
+            <a:srgbClr val="D8E1EE"/>
           </a:solidFill>
           <a:ln>
             <a:noFill/>
@@ -9711,7 +9711,7 @@
             <a:avLst/>
           </a:prstGeom>
           <a:solidFill>
-            <a:srgbClr val="F4F6FC"/>
+            <a:srgbClr val="F3F8F6"/>
           </a:solidFill>
           <a:ln>
             <a:noFill/>
@@ -9771,7 +9771,7 @@
             <a:avLst/>
           </a:prstGeom>
           <a:solidFill>
-            <a:srgbClr val="F8F8FA"/>
+            <a:srgbClr val="F8F9FA"/>
           </a:solidFill>
           <a:ln>
             <a:noFill/>
@@ -9816,7 +9816,7 @@
             <a:r>
               <a:rPr sz="1950" b="1" spc="160">
                 <a:solidFill>
-                  <a:srgbClr val="2457D6"/>
+                  <a:srgbClr val="1E7F5B"/>
                 </a:solidFill>
                 <a:latin typeface="Pretendard"/>
                 <a:ea typeface="Pretendard"/>
@@ -9857,7 +9857,7 @@
             <a:r>
               <a:rPr sz="5100" b="1">
                 <a:solidFill>
-                  <a:srgbClr val="1E2A6E"/>
+                  <a:srgbClr val="1E3E69"/>
                 </a:solidFill>
                 <a:latin typeface="Pretendard"/>
                 <a:ea typeface="Pretendard"/>
@@ -9883,7 +9883,7 @@
             <a:avLst/>
           </a:prstGeom>
           <a:solidFill>
-            <a:srgbClr val="1E2A6E"/>
+            <a:srgbClr val="1E3E69"/>
           </a:solidFill>
           <a:ln>
             <a:noFill/>
@@ -9915,11 +9915,11 @@
             </a:avLst>
           </a:prstGeom>
           <a:solidFill>
-            <a:srgbClr val="F6F8FD"/>
+            <a:srgbClr val="F4F7FA"/>
           </a:solidFill>
           <a:ln w="9525">
             <a:solidFill>
-              <a:srgbClr val="DEE3F0"/>
+              <a:srgbClr val="D8E1EE"/>
             </a:solidFill>
           </a:ln>
           <a:effectLst/>
@@ -9953,7 +9953,7 @@
           </a:solidFill>
           <a:ln w="28575">
             <a:solidFill>
-              <a:srgbClr val="1E2A6E"/>
+              <a:srgbClr val="1E3E69"/>
             </a:solidFill>
           </a:ln>
           <a:effectLst/>
@@ -9996,7 +9996,7 @@
             <a:r>
               <a:rPr sz="2400" b="1">
                 <a:solidFill>
-                  <a:srgbClr val="1E2A6E"/>
+                  <a:srgbClr val="1E3E69"/>
                 </a:solidFill>
                 <a:latin typeface="Pretendard"/>
                 <a:ea typeface="Pretendard"/>
@@ -10024,11 +10024,11 @@
             </a:avLst>
           </a:prstGeom>
           <a:solidFill>
-            <a:srgbClr val="F6F8FD"/>
+            <a:srgbClr val="F4F7FA"/>
           </a:solidFill>
           <a:ln w="9525">
             <a:solidFill>
-              <a:srgbClr val="DEE3F0"/>
+              <a:srgbClr val="D8E1EE"/>
             </a:solidFill>
           </a:ln>
           <a:effectLst/>
@@ -10062,7 +10062,7 @@
           </a:solidFill>
           <a:ln w="28575">
             <a:solidFill>
-              <a:srgbClr val="1E2A6E"/>
+              <a:srgbClr val="1E3E69"/>
             </a:solidFill>
           </a:ln>
           <a:effectLst/>
@@ -10105,7 +10105,7 @@
             <a:r>
               <a:rPr sz="2400" b="1">
                 <a:solidFill>
-                  <a:srgbClr val="1E2A6E"/>
+                  <a:srgbClr val="1E3E69"/>
                 </a:solidFill>
                 <a:latin typeface="Pretendard"/>
                 <a:ea typeface="Pretendard"/>
@@ -10133,11 +10133,11 @@
             </a:avLst>
           </a:prstGeom>
           <a:solidFill>
-            <a:srgbClr val="F6F8FD"/>
+            <a:srgbClr val="F4F7FA"/>
           </a:solidFill>
           <a:ln w="9525">
             <a:solidFill>
-              <a:srgbClr val="DEE3F0"/>
+              <a:srgbClr val="D8E1EE"/>
             </a:solidFill>
           </a:ln>
           <a:effectLst/>
@@ -10171,7 +10171,7 @@
           </a:solidFill>
           <a:ln w="28575">
             <a:solidFill>
-              <a:srgbClr val="1E2A6E"/>
+              <a:srgbClr val="1E3E69"/>
             </a:solidFill>
           </a:ln>
           <a:effectLst/>
@@ -10214,7 +10214,7 @@
             <a:r>
               <a:rPr sz="2400" b="1">
                 <a:solidFill>
-                  <a:srgbClr val="1E2A6E"/>
+                  <a:srgbClr val="1E3E69"/>
                 </a:solidFill>
                 <a:latin typeface="Pretendard"/>
                 <a:ea typeface="Pretendard"/>
@@ -10242,11 +10242,11 @@
             </a:avLst>
           </a:prstGeom>
           <a:solidFill>
-            <a:srgbClr val="F6F8FD"/>
+            <a:srgbClr val="F4F7FA"/>
           </a:solidFill>
           <a:ln w="9525">
             <a:solidFill>
-              <a:srgbClr val="DEE3F0"/>
+              <a:srgbClr val="D8E1EE"/>
             </a:solidFill>
           </a:ln>
           <a:effectLst/>
@@ -10280,7 +10280,7 @@
           </a:solidFill>
           <a:ln w="28575">
             <a:solidFill>
-              <a:srgbClr val="1E2A6E"/>
+              <a:srgbClr val="1E3E69"/>
             </a:solidFill>
           </a:ln>
           <a:effectLst/>
@@ -10323,7 +10323,7 @@
             <a:r>
               <a:rPr sz="2400" b="1">
                 <a:solidFill>
-                  <a:srgbClr val="1E2A6E"/>
+                  <a:srgbClr val="1E3E69"/>
                 </a:solidFill>
                 <a:latin typeface="Pretendard"/>
                 <a:ea typeface="Pretendard"/>
@@ -10351,11 +10351,11 @@
             </a:avLst>
           </a:prstGeom>
           <a:solidFill>
-            <a:srgbClr val="F6F8FD"/>
+            <a:srgbClr val="F4F7FA"/>
           </a:solidFill>
           <a:ln w="9525">
             <a:solidFill>
-              <a:srgbClr val="DEE3F0"/>
+              <a:srgbClr val="D8E1EE"/>
             </a:solidFill>
           </a:ln>
           <a:effectLst/>
@@ -10389,7 +10389,7 @@
           </a:solidFill>
           <a:ln w="28575">
             <a:solidFill>
-              <a:srgbClr val="1E2A6E"/>
+              <a:srgbClr val="1E3E69"/>
             </a:solidFill>
           </a:ln>
           <a:effectLst/>
@@ -10432,7 +10432,7 @@
             <a:r>
               <a:rPr sz="2400" b="1">
                 <a:solidFill>
-                  <a:srgbClr val="1E2A6E"/>
+                  <a:srgbClr val="1E3E69"/>
                 </a:solidFill>
                 <a:latin typeface="Pretendard"/>
                 <a:ea typeface="Pretendard"/>
@@ -10460,11 +10460,11 @@
             </a:avLst>
           </a:prstGeom>
           <a:solidFill>
-            <a:srgbClr val="F6F8FD"/>
+            <a:srgbClr val="F4F7FA"/>
           </a:solidFill>
           <a:ln w="9525">
             <a:solidFill>
-              <a:srgbClr val="DEE3F0"/>
+              <a:srgbClr val="D8E1EE"/>
             </a:solidFill>
           </a:ln>
           <a:effectLst/>
@@ -10498,7 +10498,7 @@
           </a:solidFill>
           <a:ln w="28575">
             <a:solidFill>
-              <a:srgbClr val="1E2A6E"/>
+              <a:srgbClr val="1E3E69"/>
             </a:solidFill>
           </a:ln>
           <a:effectLst/>
@@ -10541,7 +10541,7 @@
             <a:r>
               <a:rPr sz="2400" b="1">
                 <a:solidFill>
-                  <a:srgbClr val="1E2A6E"/>
+                  <a:srgbClr val="1E3E69"/>
                 </a:solidFill>
                 <a:latin typeface="Pretendard"/>
                 <a:ea typeface="Pretendard"/>
@@ -10569,11 +10569,11 @@
             </a:avLst>
           </a:prstGeom>
           <a:solidFill>
-            <a:srgbClr val="F6F8FD"/>
+            <a:srgbClr val="F4F7FA"/>
           </a:solidFill>
           <a:ln w="9525">
             <a:solidFill>
-              <a:srgbClr val="DEE3F0"/>
+              <a:srgbClr val="D8E1EE"/>
             </a:solidFill>
           </a:ln>
           <a:effectLst/>
@@ -10607,7 +10607,7 @@
           </a:solidFill>
           <a:ln w="28575">
             <a:solidFill>
-              <a:srgbClr val="1E2A6E"/>
+              <a:srgbClr val="1E3E69"/>
             </a:solidFill>
           </a:ln>
           <a:effectLst/>
@@ -10650,7 +10650,7 @@
             <a:r>
               <a:rPr sz="2400" b="1">
                 <a:solidFill>
-                  <a:srgbClr val="1E2A6E"/>
+                  <a:srgbClr val="1E3E69"/>
                 </a:solidFill>
                 <a:latin typeface="Pretendard"/>
                 <a:ea typeface="Pretendard"/>
@@ -10676,7 +10676,7 @@
             <a:avLst/>
           </a:prstGeom>
           <a:solidFill>
-            <a:srgbClr val="DEE3F0"/>
+            <a:srgbClr val="D8E1EE"/>
           </a:solidFill>
           <a:ln>
             <a:noFill/>
@@ -10806,7 +10806,7 @@
             <a:avLst/>
           </a:prstGeom>
           <a:solidFill>
-            <a:srgbClr val="F4F6FC"/>
+            <a:srgbClr val="F3F8F6"/>
           </a:solidFill>
           <a:ln>
             <a:noFill/>
@@ -10866,7 +10866,7 @@
             <a:avLst/>
           </a:prstGeom>
           <a:solidFill>
-            <a:srgbClr val="F8F8FA"/>
+            <a:srgbClr val="F8F9FA"/>
           </a:solidFill>
           <a:ln>
             <a:noFill/>
@@ -10898,7 +10898,7 @@
             </a:avLst>
           </a:prstGeom>
           <a:solidFill>
-            <a:srgbClr val="2457D6"/>
+            <a:srgbClr val="1E7F5B"/>
           </a:solidFill>
           <a:ln>
             <a:noFill/>
@@ -11014,7 +11014,7 @@
             <a:r>
               <a:rPr sz="1950" b="1" spc="160">
                 <a:solidFill>
-                  <a:srgbClr val="2457D6"/>
+                  <a:srgbClr val="1E7F5B"/>
                 </a:solidFill>
                 <a:latin typeface="Pretendard"/>
                 <a:ea typeface="Pretendard"/>
@@ -11055,7 +11055,7 @@
             <a:r>
               <a:rPr sz="5100" b="1">
                 <a:solidFill>
-                  <a:srgbClr val="1E2A6E"/>
+                  <a:srgbClr val="1E3E69"/>
                 </a:solidFill>
                 <a:latin typeface="Pretendard"/>
                 <a:ea typeface="Pretendard"/>
@@ -11081,7 +11081,7 @@
             <a:avLst/>
           </a:prstGeom>
           <a:solidFill>
-            <a:srgbClr val="1E2A6E"/>
+            <a:srgbClr val="1E3E69"/>
           </a:solidFill>
           <a:ln>
             <a:noFill/>
@@ -11126,7 +11126,7 @@
             <a:r>
               <a:rPr sz="2250" b="1">
                 <a:solidFill>
-                  <a:srgbClr val="2457D6"/>
+                  <a:srgbClr val="1E7F5B"/>
                 </a:solidFill>
                 <a:latin typeface="Pretendard"/>
                 <a:ea typeface="Pretendard"/>
@@ -11154,11 +11154,11 @@
             </a:avLst>
           </a:prstGeom>
           <a:solidFill>
-            <a:srgbClr val="F6F8FD"/>
+            <a:srgbClr val="F4F7FA"/>
           </a:solidFill>
           <a:ln w="9525">
             <a:solidFill>
-              <a:srgbClr val="DEE3F0"/>
+              <a:srgbClr val="D8E1EE"/>
             </a:solidFill>
           </a:ln>
           <a:effectLst/>
@@ -11186,7 +11186,7 @@
             <a:avLst/>
           </a:prstGeom>
           <a:solidFill>
-            <a:srgbClr val="1E2A6E"/>
+            <a:srgbClr val="1E3E69"/>
           </a:solidFill>
           <a:ln>
             <a:noFill/>
@@ -11272,7 +11272,7 @@
             <a:r>
               <a:rPr sz="2700" b="1">
                 <a:solidFill>
-                  <a:srgbClr val="1E2A6E"/>
+                  <a:srgbClr val="1E3E69"/>
                 </a:solidFill>
                 <a:latin typeface="Pretendard"/>
                 <a:ea typeface="Pretendard"/>
@@ -11298,7 +11298,7 @@
             <a:avLst/>
           </a:prstGeom>
           <a:solidFill>
-            <a:srgbClr val="2457D6"/>
+            <a:srgbClr val="1E7F5B"/>
           </a:solidFill>
           <a:ln>
             <a:noFill/>
@@ -11343,7 +11343,7 @@
             <a:r>
               <a:rPr sz="1875" b="1" spc="150">
                 <a:solidFill>
-                  <a:srgbClr val="2457D6"/>
+                  <a:srgbClr val="1E7F5B"/>
                 </a:solidFill>
                 <a:latin typeface="Pretendard"/>
                 <a:ea typeface="Pretendard"/>
@@ -11384,7 +11384,7 @@
             <a:r>
               <a:rPr sz="2475" b="1">
                 <a:solidFill>
-                  <a:srgbClr val="1E2A6E"/>
+                  <a:srgbClr val="1E3E69"/>
                 </a:solidFill>
                 <a:latin typeface="Pretendard"/>
                 <a:ea typeface="Pretendard"/>
@@ -11410,7 +11410,7 @@
             <a:avLst/>
           </a:prstGeom>
           <a:solidFill>
-            <a:srgbClr val="DEE3F0"/>
+            <a:srgbClr val="D8E1EE"/>
           </a:solidFill>
           <a:ln>
             <a:noFill/>
@@ -11540,7 +11540,7 @@
             <a:avLst/>
           </a:prstGeom>
           <a:solidFill>
-            <a:srgbClr val="F4F6FC"/>
+            <a:srgbClr val="F3F8F6"/>
           </a:solidFill>
           <a:ln>
             <a:noFill/>
@@ -11600,7 +11600,7 @@
             <a:avLst/>
           </a:prstGeom>
           <a:solidFill>
-            <a:srgbClr val="F8F8FA"/>
+            <a:srgbClr val="F8F9FA"/>
           </a:solidFill>
           <a:ln>
             <a:noFill/>
@@ -11645,7 +11645,7 @@
             <a:r>
               <a:rPr sz="1950" b="1" spc="160">
                 <a:solidFill>
-                  <a:srgbClr val="2457D6"/>
+                  <a:srgbClr val="1E7F5B"/>
                 </a:solidFill>
                 <a:latin typeface="Pretendard"/>
                 <a:ea typeface="Pretendard"/>
@@ -11686,7 +11686,7 @@
             <a:r>
               <a:rPr sz="5100" b="1">
                 <a:solidFill>
-                  <a:srgbClr val="1E2A6E"/>
+                  <a:srgbClr val="1E3E69"/>
                 </a:solidFill>
                 <a:latin typeface="Pretendard"/>
                 <a:ea typeface="Pretendard"/>
@@ -11712,7 +11712,7 @@
             <a:avLst/>
           </a:prstGeom>
           <a:solidFill>
-            <a:srgbClr val="1E2A6E"/>
+            <a:srgbClr val="1E3E69"/>
           </a:solidFill>
           <a:ln>
             <a:noFill/>
@@ -11742,7 +11742,7 @@
             <a:avLst/>
           </a:prstGeom>
           <a:solidFill>
-            <a:srgbClr val="1E2A6E"/>
+            <a:srgbClr val="1E3E69"/>
           </a:solidFill>
           <a:ln>
             <a:noFill/>
@@ -11787,7 +11787,7 @@
             <a:r>
               <a:rPr sz="3000" b="1">
                 <a:solidFill>
-                  <a:srgbClr val="C9D7FF"/>
+                  <a:srgbClr val="C3E6D8"/>
                 </a:solidFill>
                 <a:latin typeface="Pretendard"/>
                 <a:ea typeface="Pretendard"/>
@@ -11854,11 +11854,11 @@
             <a:avLst/>
           </a:prstGeom>
           <a:solidFill>
-            <a:srgbClr val="F6F8FD"/>
+            <a:srgbClr val="F4F7FA"/>
           </a:solidFill>
           <a:ln w="9525">
             <a:solidFill>
-              <a:srgbClr val="DEE3F0"/>
+              <a:srgbClr val="D8E1EE"/>
             </a:solidFill>
           </a:ln>
           <a:effectLst/>
@@ -11901,7 +11901,7 @@
             <a:r>
               <a:rPr sz="3000" b="1">
                 <a:solidFill>
-                  <a:srgbClr val="2457D6"/>
+                  <a:srgbClr val="1E7F5B"/>
                 </a:solidFill>
                 <a:latin typeface="Pretendard"/>
                 <a:ea typeface="Pretendard"/>
@@ -11968,7 +11968,7 @@
             <a:avLst/>
           </a:prstGeom>
           <a:solidFill>
-            <a:srgbClr val="1E2A6E"/>
+            <a:srgbClr val="1E3E69"/>
           </a:solidFill>
           <a:ln>
             <a:noFill/>
@@ -12013,7 +12013,7 @@
             <a:r>
               <a:rPr sz="3000" b="1">
                 <a:solidFill>
-                  <a:srgbClr val="C9D7FF"/>
+                  <a:srgbClr val="C3E6D8"/>
                 </a:solidFill>
                 <a:latin typeface="Pretendard"/>
                 <a:ea typeface="Pretendard"/>
@@ -12080,11 +12080,11 @@
             <a:avLst/>
           </a:prstGeom>
           <a:solidFill>
-            <a:srgbClr val="F6F8FD"/>
+            <a:srgbClr val="F4F7FA"/>
           </a:solidFill>
           <a:ln w="9525">
             <a:solidFill>
-              <a:srgbClr val="DEE3F0"/>
+              <a:srgbClr val="D8E1EE"/>
             </a:solidFill>
           </a:ln>
           <a:effectLst/>
@@ -12127,7 +12127,7 @@
             <a:r>
               <a:rPr sz="3000" b="1">
                 <a:solidFill>
-                  <a:srgbClr val="2457D6"/>
+                  <a:srgbClr val="1E7F5B"/>
                 </a:solidFill>
                 <a:latin typeface="Pretendard"/>
                 <a:ea typeface="Pretendard"/>
@@ -12194,7 +12194,7 @@
             <a:avLst/>
           </a:prstGeom>
           <a:solidFill>
-            <a:srgbClr val="1E2A6E"/>
+            <a:srgbClr val="1E3E69"/>
           </a:solidFill>
           <a:ln>
             <a:noFill/>
@@ -12239,7 +12239,7 @@
             <a:r>
               <a:rPr sz="3000" b="1">
                 <a:solidFill>
-                  <a:srgbClr val="C9D7FF"/>
+                  <a:srgbClr val="C3E6D8"/>
                 </a:solidFill>
                 <a:latin typeface="Pretendard"/>
                 <a:ea typeface="Pretendard"/>
@@ -12306,11 +12306,11 @@
             <a:avLst/>
           </a:prstGeom>
           <a:solidFill>
-            <a:srgbClr val="F6F8FD"/>
+            <a:srgbClr val="F4F7FA"/>
           </a:solidFill>
           <a:ln w="9525">
             <a:solidFill>
-              <a:srgbClr val="DEE3F0"/>
+              <a:srgbClr val="D8E1EE"/>
             </a:solidFill>
           </a:ln>
           <a:effectLst/>
@@ -12353,7 +12353,7 @@
             <a:r>
               <a:rPr sz="3000" b="1">
                 <a:solidFill>
-                  <a:srgbClr val="2457D6"/>
+                  <a:srgbClr val="1E7F5B"/>
                 </a:solidFill>
                 <a:latin typeface="Pretendard"/>
                 <a:ea typeface="Pretendard"/>
@@ -12420,7 +12420,7 @@
             <a:avLst/>
           </a:prstGeom>
           <a:solidFill>
-            <a:srgbClr val="1E2A6E"/>
+            <a:srgbClr val="1E3E69"/>
           </a:solidFill>
           <a:ln>
             <a:noFill/>
@@ -12465,7 +12465,7 @@
             <a:r>
               <a:rPr sz="3000" b="1">
                 <a:solidFill>
-                  <a:srgbClr val="C9D7FF"/>
+                  <a:srgbClr val="C3E6D8"/>
                 </a:solidFill>
                 <a:latin typeface="Pretendard"/>
                 <a:ea typeface="Pretendard"/>
@@ -12532,11 +12532,11 @@
             <a:avLst/>
           </a:prstGeom>
           <a:solidFill>
-            <a:srgbClr val="F6F8FD"/>
+            <a:srgbClr val="F4F7FA"/>
           </a:solidFill>
           <a:ln w="9525">
             <a:solidFill>
-              <a:srgbClr val="DEE3F0"/>
+              <a:srgbClr val="D8E1EE"/>
             </a:solidFill>
           </a:ln>
           <a:effectLst/>
@@ -12579,7 +12579,7 @@
             <a:r>
               <a:rPr sz="3000" b="1">
                 <a:solidFill>
-                  <a:srgbClr val="2457D6"/>
+                  <a:srgbClr val="1E7F5B"/>
                 </a:solidFill>
                 <a:latin typeface="Pretendard"/>
                 <a:ea typeface="Pretendard"/>
@@ -12646,7 +12646,7 @@
             <a:avLst/>
           </a:prstGeom>
           <a:solidFill>
-            <a:srgbClr val="DEE3F0"/>
+            <a:srgbClr val="D8E1EE"/>
           </a:solidFill>
           <a:ln>
             <a:noFill/>
@@ -12776,7 +12776,7 @@
             <a:avLst/>
           </a:prstGeom>
           <a:solidFill>
-            <a:srgbClr val="F4F6FC"/>
+            <a:srgbClr val="F3F8F6"/>
           </a:solidFill>
           <a:ln>
             <a:noFill/>
@@ -12836,7 +12836,7 @@
             <a:avLst/>
           </a:prstGeom>
           <a:solidFill>
-            <a:srgbClr val="F8F8FA"/>
+            <a:srgbClr val="F8F9FA"/>
           </a:solidFill>
           <a:ln>
             <a:noFill/>
@@ -12868,7 +12868,7 @@
             </a:avLst>
           </a:prstGeom>
           <a:solidFill>
-            <a:srgbClr val="2457D6"/>
+            <a:srgbClr val="1E7F5B"/>
           </a:solidFill>
           <a:ln>
             <a:noFill/>
@@ -12984,7 +12984,7 @@
             <a:r>
               <a:rPr sz="1950" b="1" spc="160">
                 <a:solidFill>
-                  <a:srgbClr val="2457D6"/>
+                  <a:srgbClr val="1E7F5B"/>
                 </a:solidFill>
                 <a:latin typeface="Pretendard"/>
                 <a:ea typeface="Pretendard"/>
@@ -13025,7 +13025,7 @@
             <a:r>
               <a:rPr sz="5100" b="1">
                 <a:solidFill>
-                  <a:srgbClr val="1E2A6E"/>
+                  <a:srgbClr val="1E3E69"/>
                 </a:solidFill>
                 <a:latin typeface="Pretendard"/>
                 <a:ea typeface="Pretendard"/>
@@ -13051,7 +13051,7 @@
             <a:avLst/>
           </a:prstGeom>
           <a:solidFill>
-            <a:srgbClr val="1E2A6E"/>
+            <a:srgbClr val="1E3E69"/>
           </a:solidFill>
           <a:ln>
             <a:noFill/>
@@ -13083,11 +13083,11 @@
             </a:avLst>
           </a:prstGeom>
           <a:solidFill>
-            <a:srgbClr val="F6F8FD"/>
+            <a:srgbClr val="F4F7FA"/>
           </a:solidFill>
           <a:ln w="9525">
             <a:solidFill>
-              <a:srgbClr val="DEE3F0"/>
+              <a:srgbClr val="D8E1EE"/>
             </a:solidFill>
           </a:ln>
           <a:effectLst/>
@@ -13115,7 +13115,7 @@
             <a:avLst/>
           </a:prstGeom>
           <a:solidFill>
-            <a:srgbClr val="1E2A6E"/>
+            <a:srgbClr val="1E3E69"/>
           </a:solidFill>
           <a:ln>
             <a:noFill/>
@@ -13160,7 +13160,7 @@
             <a:r>
               <a:rPr sz="1425" b="1">
                 <a:solidFill>
-                  <a:srgbClr val="1E2A6E"/>
+                  <a:srgbClr val="1E3E69"/>
                 </a:solidFill>
                 <a:latin typeface="Pretendard"/>
                 <a:ea typeface="Pretendard"/>
@@ -13211,7 +13211,7 @@
           </a:solidFill>
           <a:ln w="9525">
             <a:solidFill>
-              <a:srgbClr val="DEE3F0"/>
+              <a:srgbClr val="D8E1EE"/>
             </a:solidFill>
           </a:ln>
           <a:effectLst/>
@@ -13241,11 +13241,11 @@
             </a:avLst>
           </a:prstGeom>
           <a:solidFill>
-            <a:srgbClr val="F6F8FD"/>
+            <a:srgbClr val="F4F7FA"/>
           </a:solidFill>
           <a:ln w="9525">
             <a:solidFill>
-              <a:srgbClr val="DEE3F0"/>
+              <a:srgbClr val="D8E1EE"/>
             </a:solidFill>
           </a:ln>
           <a:effectLst/>
@@ -13273,7 +13273,7 @@
             <a:avLst/>
           </a:prstGeom>
           <a:solidFill>
-            <a:srgbClr val="1E2A6E"/>
+            <a:srgbClr val="1E3E69"/>
           </a:solidFill>
           <a:ln>
             <a:noFill/>
@@ -13318,7 +13318,7 @@
             <a:r>
               <a:rPr sz="1425" b="1">
                 <a:solidFill>
-                  <a:srgbClr val="1E2A6E"/>
+                  <a:srgbClr val="1E3E69"/>
                 </a:solidFill>
                 <a:latin typeface="Pretendard"/>
                 <a:ea typeface="Pretendard"/>
@@ -13348,7 +13348,7 @@
           </a:solidFill>
           <a:ln w="9525">
             <a:solidFill>
-              <a:srgbClr val="DEE3F0"/>
+              <a:srgbClr val="D8E1EE"/>
             </a:solidFill>
           </a:ln>
           <a:effectLst/>
@@ -13378,11 +13378,11 @@
             </a:avLst>
           </a:prstGeom>
           <a:solidFill>
-            <a:srgbClr val="F6F8FD"/>
+            <a:srgbClr val="F4F7FA"/>
           </a:solidFill>
           <a:ln w="9525">
             <a:solidFill>
-              <a:srgbClr val="DEE3F0"/>
+              <a:srgbClr val="D8E1EE"/>
             </a:solidFill>
           </a:ln>
           <a:effectLst/>
@@ -13410,7 +13410,7 @@
             <a:avLst/>
           </a:prstGeom>
           <a:solidFill>
-            <a:srgbClr val="1E2A6E"/>
+            <a:srgbClr val="1E3E69"/>
           </a:solidFill>
           <a:ln>
             <a:noFill/>
@@ -13455,7 +13455,7 @@
             <a:r>
               <a:rPr sz="1425" b="1">
                 <a:solidFill>
-                  <a:srgbClr val="1E2A6E"/>
+                  <a:srgbClr val="1E3E69"/>
                 </a:solidFill>
                 <a:latin typeface="Pretendard"/>
                 <a:ea typeface="Pretendard"/>
@@ -13506,7 +13506,7 @@
           </a:solidFill>
           <a:ln w="9525">
             <a:solidFill>
-              <a:srgbClr val="DEE3F0"/>
+              <a:srgbClr val="D8E1EE"/>
             </a:solidFill>
           </a:ln>
           <a:effectLst/>
@@ -13536,11 +13536,11 @@
             </a:avLst>
           </a:prstGeom>
           <a:solidFill>
-            <a:srgbClr val="F6F8FD"/>
+            <a:srgbClr val="F4F7FA"/>
           </a:solidFill>
           <a:ln w="9525">
             <a:solidFill>
-              <a:srgbClr val="DEE3F0"/>
+              <a:srgbClr val="D8E1EE"/>
             </a:solidFill>
           </a:ln>
           <a:effectLst/>
@@ -13568,7 +13568,7 @@
             <a:avLst/>
           </a:prstGeom>
           <a:solidFill>
-            <a:srgbClr val="1E2A6E"/>
+            <a:srgbClr val="1E3E69"/>
           </a:solidFill>
           <a:ln>
             <a:noFill/>
@@ -13613,7 +13613,7 @@
             <a:r>
               <a:rPr sz="1425" b="1">
                 <a:solidFill>
-                  <a:srgbClr val="1E2A6E"/>
+                  <a:srgbClr val="1E3E69"/>
                 </a:solidFill>
                 <a:latin typeface="Pretendard"/>
                 <a:ea typeface="Pretendard"/>
@@ -13664,7 +13664,7 @@
           </a:solidFill>
           <a:ln w="9525">
             <a:solidFill>
-              <a:srgbClr val="DEE3F0"/>
+              <a:srgbClr val="D8E1EE"/>
             </a:solidFill>
           </a:ln>
           <a:effectLst/>
@@ -13692,7 +13692,7 @@
             <a:avLst/>
           </a:prstGeom>
           <a:solidFill>
-            <a:srgbClr val="C9D7FF"/>
+            <a:srgbClr val="C3E6D8"/>
           </a:solidFill>
           <a:ln>
             <a:noFill/>
@@ -13763,7 +13763,7 @@
             <a:avLst/>
           </a:prstGeom>
           <a:solidFill>
-            <a:srgbClr val="DEE3F0"/>
+            <a:srgbClr val="D8E1EE"/>
           </a:solidFill>
           <a:ln>
             <a:noFill/>
@@ -13893,7 +13893,7 @@
             <a:avLst/>
           </a:prstGeom>
           <a:solidFill>
-            <a:srgbClr val="F4F6FC"/>
+            <a:srgbClr val="F3F8F6"/>
           </a:solidFill>
           <a:ln>
             <a:noFill/>
@@ -13953,7 +13953,7 @@
             <a:avLst/>
           </a:prstGeom>
           <a:solidFill>
-            <a:srgbClr val="F8F8FA"/>
+            <a:srgbClr val="F8F9FA"/>
           </a:solidFill>
           <a:ln>
             <a:noFill/>
@@ -13998,7 +13998,7 @@
             <a:r>
               <a:rPr sz="1950" b="1" spc="160">
                 <a:solidFill>
-                  <a:srgbClr val="2457D6"/>
+                  <a:srgbClr val="1E7F5B"/>
                 </a:solidFill>
                 <a:latin typeface="Pretendard"/>
                 <a:ea typeface="Pretendard"/>
@@ -14039,7 +14039,7 @@
             <a:r>
               <a:rPr sz="5100" b="1">
                 <a:solidFill>
-                  <a:srgbClr val="1E2A6E"/>
+                  <a:srgbClr val="1E3E69"/>
                 </a:solidFill>
                 <a:latin typeface="Pretendard"/>
                 <a:ea typeface="Pretendard"/>
@@ -14065,7 +14065,7 @@
             <a:avLst/>
           </a:prstGeom>
           <a:solidFill>
-            <a:srgbClr val="1E2A6E"/>
+            <a:srgbClr val="1E3E69"/>
           </a:solidFill>
           <a:ln>
             <a:noFill/>
@@ -14097,11 +14097,11 @@
             </a:avLst>
           </a:prstGeom>
           <a:solidFill>
-            <a:srgbClr val="F6F8FD"/>
+            <a:srgbClr val="F4F7FA"/>
           </a:solidFill>
           <a:ln w="9525">
             <a:solidFill>
-              <a:srgbClr val="DEE3F0"/>
+              <a:srgbClr val="D8E1EE"/>
             </a:solidFill>
           </a:ln>
           <a:effectLst/>
@@ -14129,7 +14129,7 @@
             <a:avLst/>
           </a:prstGeom>
           <a:solidFill>
-            <a:srgbClr val="1E2A6E"/>
+            <a:srgbClr val="1E3E69"/>
           </a:solidFill>
           <a:ln>
             <a:noFill/>
@@ -14215,7 +14215,7 @@
             <a:r>
               <a:rPr sz="2325" b="1">
                 <a:solidFill>
-                  <a:srgbClr val="1E2A6E"/>
+                  <a:srgbClr val="1E3E69"/>
                 </a:solidFill>
                 <a:latin typeface="Pretendard"/>
                 <a:ea typeface="Pretendard"/>
@@ -14243,11 +14243,11 @@
             </a:avLst>
           </a:prstGeom>
           <a:solidFill>
-            <a:srgbClr val="F6F8FD"/>
+            <a:srgbClr val="F4F7FA"/>
           </a:solidFill>
           <a:ln w="9525">
             <a:solidFill>
-              <a:srgbClr val="DEE3F0"/>
+              <a:srgbClr val="D8E1EE"/>
             </a:solidFill>
           </a:ln>
           <a:effectLst/>
@@ -14275,7 +14275,7 @@
             <a:avLst/>
           </a:prstGeom>
           <a:solidFill>
-            <a:srgbClr val="1E2A6E"/>
+            <a:srgbClr val="1E3E69"/>
           </a:solidFill>
           <a:ln>
             <a:noFill/>
@@ -14361,7 +14361,7 @@
             <a:r>
               <a:rPr sz="2325" b="1">
                 <a:solidFill>
-                  <a:srgbClr val="1E2A6E"/>
+                  <a:srgbClr val="1E3E69"/>
                 </a:solidFill>
                 <a:latin typeface="Pretendard"/>
                 <a:ea typeface="Pretendard"/>
@@ -14389,11 +14389,11 @@
             </a:avLst>
           </a:prstGeom>
           <a:solidFill>
-            <a:srgbClr val="F6F8FD"/>
+            <a:srgbClr val="F4F7FA"/>
           </a:solidFill>
           <a:ln w="9525">
             <a:solidFill>
-              <a:srgbClr val="DEE3F0"/>
+              <a:srgbClr val="D8E1EE"/>
             </a:solidFill>
           </a:ln>
           <a:effectLst/>
@@ -14421,7 +14421,7 @@
             <a:avLst/>
           </a:prstGeom>
           <a:solidFill>
-            <a:srgbClr val="1E2A6E"/>
+            <a:srgbClr val="1E3E69"/>
           </a:solidFill>
           <a:ln>
             <a:noFill/>
@@ -14507,7 +14507,7 @@
             <a:r>
               <a:rPr sz="2325" b="1">
                 <a:solidFill>
-                  <a:srgbClr val="1E2A6E"/>
+                  <a:srgbClr val="1E3E69"/>
                 </a:solidFill>
                 <a:latin typeface="Pretendard"/>
                 <a:ea typeface="Pretendard"/>
@@ -14535,11 +14535,11 @@
             </a:avLst>
           </a:prstGeom>
           <a:solidFill>
-            <a:srgbClr val="F6F8FD"/>
+            <a:srgbClr val="F4F7FA"/>
           </a:solidFill>
           <a:ln w="9525">
             <a:solidFill>
-              <a:srgbClr val="DEE3F0"/>
+              <a:srgbClr val="D8E1EE"/>
             </a:solidFill>
           </a:ln>
           <a:effectLst/>
@@ -14567,7 +14567,7 @@
             <a:avLst/>
           </a:prstGeom>
           <a:solidFill>
-            <a:srgbClr val="1E2A6E"/>
+            <a:srgbClr val="1E3E69"/>
           </a:solidFill>
           <a:ln>
             <a:noFill/>
@@ -14653,7 +14653,7 @@
             <a:r>
               <a:rPr sz="2325" b="1">
                 <a:solidFill>
-                  <a:srgbClr val="1E2A6E"/>
+                  <a:srgbClr val="1E3E69"/>
                 </a:solidFill>
                 <a:latin typeface="Pretendard"/>
                 <a:ea typeface="Pretendard"/>
@@ -14681,11 +14681,11 @@
             </a:avLst>
           </a:prstGeom>
           <a:solidFill>
-            <a:srgbClr val="EAF0FF"/>
+            <a:srgbClr val="E6F4EE"/>
           </a:solidFill>
           <a:ln w="9525">
             <a:solidFill>
-              <a:srgbClr val="C9D7FF"/>
+              <a:srgbClr val="C3E6D8"/>
             </a:solidFill>
           </a:ln>
           <a:effectLst/>
@@ -14728,7 +14728,7 @@
             <a:r>
               <a:rPr sz="2475" b="1">
                 <a:solidFill>
-                  <a:srgbClr val="1E2A6E"/>
+                  <a:srgbClr val="1E3E69"/>
                 </a:solidFill>
                 <a:latin typeface="Pretendard"/>
                 <a:ea typeface="Pretendard"/>
@@ -14754,7 +14754,7 @@
             <a:avLst/>
           </a:prstGeom>
           <a:solidFill>
-            <a:srgbClr val="DEE3F0"/>
+            <a:srgbClr val="D8E1EE"/>
           </a:solidFill>
           <a:ln>
             <a:noFill/>
@@ -14884,7 +14884,7 @@
             <a:avLst/>
           </a:prstGeom>
           <a:solidFill>
-            <a:srgbClr val="F4F6FC"/>
+            <a:srgbClr val="F3F8F6"/>
           </a:solidFill>
           <a:ln>
             <a:noFill/>
@@ -14944,7 +14944,7 @@
             <a:avLst/>
           </a:prstGeom>
           <a:solidFill>
-            <a:srgbClr val="F8F8FA"/>
+            <a:srgbClr val="F8F9FA"/>
           </a:solidFill>
           <a:ln>
             <a:noFill/>
@@ -14989,7 +14989,7 @@
             <a:r>
               <a:rPr sz="1950" b="1" spc="160">
                 <a:solidFill>
-                  <a:srgbClr val="2457D6"/>
+                  <a:srgbClr val="1E7F5B"/>
                 </a:solidFill>
                 <a:latin typeface="Pretendard"/>
                 <a:ea typeface="Pretendard"/>
@@ -15030,7 +15030,7 @@
             <a:r>
               <a:rPr sz="5100" b="1">
                 <a:solidFill>
-                  <a:srgbClr val="1E2A6E"/>
+                  <a:srgbClr val="1E3E69"/>
                 </a:solidFill>
                 <a:latin typeface="Pretendard"/>
                 <a:ea typeface="Pretendard"/>
@@ -15056,7 +15056,7 @@
             <a:avLst/>
           </a:prstGeom>
           <a:solidFill>
-            <a:srgbClr val="1E2A6E"/>
+            <a:srgbClr val="1E3E69"/>
           </a:solidFill>
           <a:ln>
             <a:noFill/>
@@ -15086,7 +15086,7 @@
             <a:avLst/>
           </a:prstGeom>
           <a:solidFill>
-            <a:srgbClr val="C9D7FF"/>
+            <a:srgbClr val="C3E6D8"/>
           </a:solidFill>
           <a:ln>
             <a:noFill/>
@@ -15131,7 +15131,7 @@
             <a:r>
               <a:rPr sz="1950" b="1">
                 <a:solidFill>
-                  <a:srgbClr val="2457D6"/>
+                  <a:srgbClr val="1E7F5B"/>
                 </a:solidFill>
                 <a:latin typeface="Pretendard"/>
                 <a:ea typeface="Pretendard"/>
@@ -15157,7 +15157,7 @@
             <a:avLst/>
           </a:prstGeom>
           <a:solidFill>
-            <a:srgbClr val="2457D6"/>
+            <a:srgbClr val="1E7F5B"/>
           </a:solidFill>
           <a:ln>
             <a:noFill/>
@@ -15189,11 +15189,11 @@
             </a:avLst>
           </a:prstGeom>
           <a:solidFill>
-            <a:srgbClr val="F6F8FD"/>
+            <a:srgbClr val="F4F7FA"/>
           </a:solidFill>
           <a:ln w="9525">
             <a:solidFill>
-              <a:srgbClr val="DEE3F0"/>
+              <a:srgbClr val="D8E1EE"/>
             </a:solidFill>
           </a:ln>
           <a:effectLst/>
@@ -15236,7 +15236,7 @@
             <a:r>
               <a:rPr sz="2250" b="1">
                 <a:solidFill>
-                  <a:srgbClr val="1E2A6E"/>
+                  <a:srgbClr val="1E3E69"/>
                 </a:solidFill>
                 <a:latin typeface="Pretendard"/>
                 <a:ea typeface="Pretendard"/>
@@ -15262,7 +15262,7 @@
             <a:avLst/>
           </a:prstGeom>
           <a:solidFill>
-            <a:srgbClr val="DEE3F0"/>
+            <a:srgbClr val="D8E1EE"/>
           </a:solidFill>
           <a:ln>
             <a:noFill/>
@@ -15307,7 +15307,7 @@
             <a:r>
               <a:rPr sz="1500" b="1" spc="120">
                 <a:solidFill>
-                  <a:srgbClr val="2457D6"/>
+                  <a:srgbClr val="1E7F5B"/>
                 </a:solidFill>
                 <a:latin typeface="Pretendard"/>
                 <a:ea typeface="Pretendard"/>
@@ -15389,7 +15389,7 @@
             <a:r>
               <a:rPr sz="1950" b="1">
                 <a:solidFill>
-                  <a:srgbClr val="2457D6"/>
+                  <a:srgbClr val="1E7F5B"/>
                 </a:solidFill>
                 <a:latin typeface="Pretendard"/>
                 <a:ea typeface="Pretendard"/>
@@ -15415,7 +15415,7 @@
             <a:avLst/>
           </a:prstGeom>
           <a:solidFill>
-            <a:srgbClr val="2457D6"/>
+            <a:srgbClr val="1E7F5B"/>
           </a:solidFill>
           <a:ln>
             <a:noFill/>
@@ -15447,11 +15447,11 @@
             </a:avLst>
           </a:prstGeom>
           <a:solidFill>
-            <a:srgbClr val="F6F8FD"/>
+            <a:srgbClr val="F4F7FA"/>
           </a:solidFill>
           <a:ln w="9525">
             <a:solidFill>
-              <a:srgbClr val="DEE3F0"/>
+              <a:srgbClr val="D8E1EE"/>
             </a:solidFill>
           </a:ln>
           <a:effectLst/>
@@ -15494,7 +15494,7 @@
             <a:r>
               <a:rPr sz="2250" b="1">
                 <a:solidFill>
-                  <a:srgbClr val="1E2A6E"/>
+                  <a:srgbClr val="1E3E69"/>
                 </a:solidFill>
                 <a:latin typeface="Pretendard"/>
                 <a:ea typeface="Pretendard"/>
@@ -15520,7 +15520,7 @@
             <a:avLst/>
           </a:prstGeom>
           <a:solidFill>
-            <a:srgbClr val="DEE3F0"/>
+            <a:srgbClr val="D8E1EE"/>
           </a:solidFill>
           <a:ln>
             <a:noFill/>
@@ -15565,7 +15565,7 @@
             <a:r>
               <a:rPr sz="1500" b="1" spc="120">
                 <a:solidFill>
-                  <a:srgbClr val="2457D6"/>
+                  <a:srgbClr val="1E7F5B"/>
                 </a:solidFill>
                 <a:latin typeface="Pretendard"/>
                 <a:ea typeface="Pretendard"/>
@@ -15647,7 +15647,7 @@
             <a:r>
               <a:rPr sz="1950" b="1">
                 <a:solidFill>
-                  <a:srgbClr val="2457D6"/>
+                  <a:srgbClr val="1E7F5B"/>
                 </a:solidFill>
                 <a:latin typeface="Pretendard"/>
                 <a:ea typeface="Pretendard"/>
@@ -15673,7 +15673,7 @@
             <a:avLst/>
           </a:prstGeom>
           <a:solidFill>
-            <a:srgbClr val="2457D6"/>
+            <a:srgbClr val="1E7F5B"/>
           </a:solidFill>
           <a:ln>
             <a:noFill/>
@@ -15705,11 +15705,11 @@
             </a:avLst>
           </a:prstGeom>
           <a:solidFill>
-            <a:srgbClr val="F6F8FD"/>
+            <a:srgbClr val="F4F7FA"/>
           </a:solidFill>
           <a:ln w="9525">
             <a:solidFill>
-              <a:srgbClr val="DEE3F0"/>
+              <a:srgbClr val="D8E1EE"/>
             </a:solidFill>
           </a:ln>
           <a:effectLst/>
@@ -15752,7 +15752,7 @@
             <a:r>
               <a:rPr sz="2250" b="1">
                 <a:solidFill>
-                  <a:srgbClr val="1E2A6E"/>
+                  <a:srgbClr val="1E3E69"/>
                 </a:solidFill>
                 <a:latin typeface="Pretendard"/>
                 <a:ea typeface="Pretendard"/>
@@ -15778,7 +15778,7 @@
             <a:avLst/>
           </a:prstGeom>
           <a:solidFill>
-            <a:srgbClr val="DEE3F0"/>
+            <a:srgbClr val="D8E1EE"/>
           </a:solidFill>
           <a:ln>
             <a:noFill/>
@@ -15823,7 +15823,7 @@
             <a:r>
               <a:rPr sz="1500" b="1" spc="120">
                 <a:solidFill>
-                  <a:srgbClr val="2457D6"/>
+                  <a:srgbClr val="1E7F5B"/>
                 </a:solidFill>
                 <a:latin typeface="Pretendard"/>
                 <a:ea typeface="Pretendard"/>
@@ -15905,7 +15905,7 @@
             <a:r>
               <a:rPr sz="1950" b="1">
                 <a:solidFill>
-                  <a:srgbClr val="1E2A6E"/>
+                  <a:srgbClr val="1E3E69"/>
                 </a:solidFill>
                 <a:latin typeface="Pretendard"/>
                 <a:ea typeface="Pretendard"/>
@@ -15931,7 +15931,7 @@
             <a:avLst/>
           </a:prstGeom>
           <a:solidFill>
-            <a:srgbClr val="1E2A6E"/>
+            <a:srgbClr val="1E3E69"/>
           </a:solidFill>
           <a:ln>
             <a:noFill/>
@@ -15963,11 +15963,11 @@
             </a:avLst>
           </a:prstGeom>
           <a:solidFill>
-            <a:srgbClr val="EAF0FF"/>
+            <a:srgbClr val="E6F4EE"/>
           </a:solidFill>
           <a:ln w="19050">
             <a:solidFill>
-              <a:srgbClr val="1E2A6E"/>
+              <a:srgbClr val="1E3E69"/>
             </a:solidFill>
           </a:ln>
           <a:effectLst/>
@@ -16010,7 +16010,7 @@
             <a:r>
               <a:rPr sz="2250" b="1">
                 <a:solidFill>
-                  <a:srgbClr val="1E2A6E"/>
+                  <a:srgbClr val="1E3E69"/>
                 </a:solidFill>
                 <a:latin typeface="Pretendard"/>
                 <a:ea typeface="Pretendard"/>
@@ -16036,7 +16036,7 @@
             <a:avLst/>
           </a:prstGeom>
           <a:solidFill>
-            <a:srgbClr val="DEE3F0"/>
+            <a:srgbClr val="D8E1EE"/>
           </a:solidFill>
           <a:ln>
             <a:noFill/>
@@ -16081,7 +16081,7 @@
             <a:r>
               <a:rPr sz="1500" b="1" spc="120">
                 <a:solidFill>
-                  <a:srgbClr val="2457D6"/>
+                  <a:srgbClr val="1E7F5B"/>
                 </a:solidFill>
                 <a:latin typeface="Pretendard"/>
                 <a:ea typeface="Pretendard"/>
@@ -16148,7 +16148,7 @@
             <a:avLst/>
           </a:prstGeom>
           <a:solidFill>
-            <a:srgbClr val="C9D7FF"/>
+            <a:srgbClr val="C3E6D8"/>
           </a:solidFill>
           <a:ln>
             <a:noFill/>
@@ -16219,7 +16219,7 @@
             <a:avLst/>
           </a:prstGeom>
           <a:solidFill>
-            <a:srgbClr val="DEE3F0"/>
+            <a:srgbClr val="D8E1EE"/>
           </a:solidFill>
           <a:ln>
             <a:noFill/>
@@ -16349,7 +16349,7 @@
             <a:avLst/>
           </a:prstGeom>
           <a:solidFill>
-            <a:srgbClr val="F4F6FC"/>
+            <a:srgbClr val="F3F8F6"/>
           </a:solidFill>
           <a:ln>
             <a:noFill/>
@@ -16409,7 +16409,7 @@
             <a:avLst/>
           </a:prstGeom>
           <a:solidFill>
-            <a:srgbClr val="F8F8FA"/>
+            <a:srgbClr val="F8F9FA"/>
           </a:solidFill>
           <a:ln>
             <a:noFill/>
@@ -16454,7 +16454,7 @@
             <a:r>
               <a:rPr sz="1950" b="1" spc="160">
                 <a:solidFill>
-                  <a:srgbClr val="2457D6"/>
+                  <a:srgbClr val="1E7F5B"/>
                 </a:solidFill>
                 <a:latin typeface="Pretendard"/>
                 <a:ea typeface="Pretendard"/>
@@ -16495,7 +16495,7 @@
             <a:r>
               <a:rPr sz="5100" b="1">
                 <a:solidFill>
-                  <a:srgbClr val="1E2A6E"/>
+                  <a:srgbClr val="1E3E69"/>
                 </a:solidFill>
                 <a:latin typeface="Pretendard"/>
                 <a:ea typeface="Pretendard"/>
@@ -16521,7 +16521,7 @@
             <a:avLst/>
           </a:prstGeom>
           <a:solidFill>
-            <a:srgbClr val="1E2A6E"/>
+            <a:srgbClr val="1E3E69"/>
           </a:solidFill>
           <a:ln>
             <a:noFill/>
@@ -16553,11 +16553,11 @@
             </a:avLst>
           </a:prstGeom>
           <a:solidFill>
-            <a:srgbClr val="F6F8FD"/>
+            <a:srgbClr val="F4F7FA"/>
           </a:solidFill>
           <a:ln w="9525">
             <a:solidFill>
-              <a:srgbClr val="DEE3F0"/>
+              <a:srgbClr val="D8E1EE"/>
             </a:solidFill>
           </a:ln>
           <a:effectLst/>
@@ -16585,7 +16585,7 @@
             <a:avLst/>
           </a:prstGeom>
           <a:solidFill>
-            <a:srgbClr val="1E2A6E"/>
+            <a:srgbClr val="1E3E69"/>
           </a:solidFill>
           <a:ln>
             <a:noFill/>
@@ -16671,7 +16671,7 @@
             <a:r>
               <a:rPr sz="2325" b="1">
                 <a:solidFill>
-                  <a:srgbClr val="1E2A6E"/>
+                  <a:srgbClr val="1E3E69"/>
                 </a:solidFill>
                 <a:latin typeface="Pretendard"/>
                 <a:ea typeface="Pretendard"/>
@@ -16699,11 +16699,11 @@
             </a:avLst>
           </a:prstGeom>
           <a:solidFill>
-            <a:srgbClr val="F6F8FD"/>
+            <a:srgbClr val="F4F7FA"/>
           </a:solidFill>
           <a:ln w="9525">
             <a:solidFill>
-              <a:srgbClr val="DEE3F0"/>
+              <a:srgbClr val="D8E1EE"/>
             </a:solidFill>
           </a:ln>
           <a:effectLst/>
@@ -16731,7 +16731,7 @@
             <a:avLst/>
           </a:prstGeom>
           <a:solidFill>
-            <a:srgbClr val="1E2A6E"/>
+            <a:srgbClr val="1E3E69"/>
           </a:solidFill>
           <a:ln>
             <a:noFill/>
@@ -16817,7 +16817,7 @@
             <a:r>
               <a:rPr sz="2325" b="1">
                 <a:solidFill>
-                  <a:srgbClr val="1E2A6E"/>
+                  <a:srgbClr val="1E3E69"/>
                 </a:solidFill>
                 <a:latin typeface="Pretendard"/>
                 <a:ea typeface="Pretendard"/>
@@ -16845,11 +16845,11 @@
             </a:avLst>
           </a:prstGeom>
           <a:solidFill>
-            <a:srgbClr val="F6F8FD"/>
+            <a:srgbClr val="F4F7FA"/>
           </a:solidFill>
           <a:ln w="9525">
             <a:solidFill>
-              <a:srgbClr val="DEE3F0"/>
+              <a:srgbClr val="D8E1EE"/>
             </a:solidFill>
           </a:ln>
           <a:effectLst/>
@@ -16877,7 +16877,7 @@
             <a:avLst/>
           </a:prstGeom>
           <a:solidFill>
-            <a:srgbClr val="1E2A6E"/>
+            <a:srgbClr val="1E3E69"/>
           </a:solidFill>
           <a:ln>
             <a:noFill/>
@@ -16963,7 +16963,7 @@
             <a:r>
               <a:rPr sz="2325" b="1">
                 <a:solidFill>
-                  <a:srgbClr val="1E2A6E"/>
+                  <a:srgbClr val="1E3E69"/>
                 </a:solidFill>
                 <a:latin typeface="Pretendard"/>
                 <a:ea typeface="Pretendard"/>
@@ -16991,11 +16991,11 @@
             </a:avLst>
           </a:prstGeom>
           <a:solidFill>
-            <a:srgbClr val="F6F8FD"/>
+            <a:srgbClr val="F4F7FA"/>
           </a:solidFill>
           <a:ln w="9525">
             <a:solidFill>
-              <a:srgbClr val="DEE3F0"/>
+              <a:srgbClr val="D8E1EE"/>
             </a:solidFill>
           </a:ln>
           <a:effectLst/>
@@ -17023,7 +17023,7 @@
             <a:avLst/>
           </a:prstGeom>
           <a:solidFill>
-            <a:srgbClr val="1E2A6E"/>
+            <a:srgbClr val="1E3E69"/>
           </a:solidFill>
           <a:ln>
             <a:noFill/>
@@ -17109,7 +17109,7 @@
             <a:r>
               <a:rPr sz="2325" b="1">
                 <a:solidFill>
-                  <a:srgbClr val="1E2A6E"/>
+                  <a:srgbClr val="1E3E69"/>
                 </a:solidFill>
                 <a:latin typeface="Pretendard"/>
                 <a:ea typeface="Pretendard"/>
@@ -17137,11 +17137,11 @@
             </a:avLst>
           </a:prstGeom>
           <a:solidFill>
-            <a:srgbClr val="EAF0FF"/>
+            <a:srgbClr val="E6F4EE"/>
           </a:solidFill>
           <a:ln w="9525">
             <a:solidFill>
-              <a:srgbClr val="C9D7FF"/>
+              <a:srgbClr val="C3E6D8"/>
             </a:solidFill>
           </a:ln>
           <a:effectLst/>
@@ -17184,7 +17184,7 @@
             <a:r>
               <a:rPr sz="2475" b="1">
                 <a:solidFill>
-                  <a:srgbClr val="1E2A6E"/>
+                  <a:srgbClr val="1E3E69"/>
                 </a:solidFill>
                 <a:latin typeface="Pretendard"/>
                 <a:ea typeface="Pretendard"/>
@@ -17210,7 +17210,7 @@
             <a:avLst/>
           </a:prstGeom>
           <a:solidFill>
-            <a:srgbClr val="DEE3F0"/>
+            <a:srgbClr val="D8E1EE"/>
           </a:solidFill>
           <a:ln>
             <a:noFill/>
@@ -17340,7 +17340,7 @@
             <a:avLst/>
           </a:prstGeom>
           <a:solidFill>
-            <a:srgbClr val="F4F6FC"/>
+            <a:srgbClr val="F3F8F6"/>
           </a:solidFill>
           <a:ln>
             <a:noFill/>
@@ -17370,7 +17370,7 @@
             <a:avLst/>
           </a:prstGeom>
           <a:solidFill>
-            <a:srgbClr val="F6F6F9"/>
+            <a:srgbClr val="F6F7F9"/>
           </a:solidFill>
           <a:ln>
             <a:noFill/>
@@ -17400,7 +17400,7 @@
             <a:avLst/>
           </a:prstGeom>
           <a:solidFill>
-            <a:srgbClr val="1E2A6E"/>
+            <a:srgbClr val="1E3E69"/>
           </a:solidFill>
           <a:ln>
             <a:noFill/>
@@ -17445,7 +17445,7 @@
             <a:r>
               <a:rPr sz="2400" b="1">
                 <a:solidFill>
-                  <a:srgbClr val="2457D6"/>
+                  <a:srgbClr val="1E7F5B"/>
                 </a:solidFill>
                 <a:latin typeface="Pretendard"/>
                 <a:ea typeface="Pretendard"/>
@@ -17486,7 +17486,7 @@
             <a:r>
               <a:rPr sz="5100" b="1">
                 <a:solidFill>
-                  <a:srgbClr val="1E2A6E"/>
+                  <a:srgbClr val="1E3E69"/>
                 </a:solidFill>
                 <a:latin typeface="Pretendard"/>
                 <a:ea typeface="Pretendard"/>
@@ -17555,11 +17555,11 @@
             </a:avLst>
           </a:prstGeom>
           <a:solidFill>
-            <a:srgbClr val="F6F8FD"/>
+            <a:srgbClr val="F4F7FA"/>
           </a:solidFill>
           <a:ln w="9525">
             <a:solidFill>
-              <a:srgbClr val="DEE3F0"/>
+              <a:srgbClr val="D8E1EE"/>
             </a:solidFill>
           </a:ln>
           <a:effectLst/>
@@ -17602,7 +17602,7 @@
             <a:r>
               <a:rPr sz="2475" b="1">
                 <a:solidFill>
-                  <a:srgbClr val="2457D6"/>
+                  <a:srgbClr val="1E7F5B"/>
                 </a:solidFill>
                 <a:latin typeface="Pretendard"/>
                 <a:ea typeface="Pretendard"/>
@@ -17643,7 +17643,7 @@
             <a:r>
               <a:rPr sz="2475" b="1">
                 <a:solidFill>
-                  <a:srgbClr val="1E2A6E"/>
+                  <a:srgbClr val="1E3E69"/>
                 </a:solidFill>
                 <a:latin typeface="Pretendard"/>
                 <a:ea typeface="Pretendard"/>
@@ -17671,11 +17671,11 @@
             </a:avLst>
           </a:prstGeom>
           <a:solidFill>
-            <a:srgbClr val="F6F8FD"/>
+            <a:srgbClr val="F4F7FA"/>
           </a:solidFill>
           <a:ln w="9525">
             <a:solidFill>
-              <a:srgbClr val="DEE3F0"/>
+              <a:srgbClr val="D8E1EE"/>
             </a:solidFill>
           </a:ln>
           <a:effectLst/>
@@ -17718,7 +17718,7 @@
             <a:r>
               <a:rPr sz="2475" b="1">
                 <a:solidFill>
-                  <a:srgbClr val="2457D6"/>
+                  <a:srgbClr val="1E7F5B"/>
                 </a:solidFill>
                 <a:latin typeface="Pretendard"/>
                 <a:ea typeface="Pretendard"/>
@@ -17759,7 +17759,7 @@
             <a:r>
               <a:rPr sz="2475" b="1">
                 <a:solidFill>
-                  <a:srgbClr val="1E2A6E"/>
+                  <a:srgbClr val="1E3E69"/>
                 </a:solidFill>
                 <a:latin typeface="Pretendard"/>
                 <a:ea typeface="Pretendard"/>
@@ -17787,11 +17787,11 @@
             </a:avLst>
           </a:prstGeom>
           <a:solidFill>
-            <a:srgbClr val="F6F8FD"/>
+            <a:srgbClr val="F4F7FA"/>
           </a:solidFill>
           <a:ln w="9525">
             <a:solidFill>
-              <a:srgbClr val="DEE3F0"/>
+              <a:srgbClr val="D8E1EE"/>
             </a:solidFill>
           </a:ln>
           <a:effectLst/>
@@ -17834,7 +17834,7 @@
             <a:r>
               <a:rPr sz="2475" b="1">
                 <a:solidFill>
-                  <a:srgbClr val="2457D6"/>
+                  <a:srgbClr val="1E7F5B"/>
                 </a:solidFill>
                 <a:latin typeface="Pretendard"/>
                 <a:ea typeface="Pretendard"/>
@@ -17875,7 +17875,7 @@
             <a:r>
               <a:rPr sz="2475" b="1">
                 <a:solidFill>
-                  <a:srgbClr val="1E2A6E"/>
+                  <a:srgbClr val="1E3E69"/>
                 </a:solidFill>
                 <a:latin typeface="Pretendard"/>
                 <a:ea typeface="Pretendard"/>
@@ -17903,11 +17903,11 @@
             </a:avLst>
           </a:prstGeom>
           <a:solidFill>
-            <a:srgbClr val="F6F8FD"/>
+            <a:srgbClr val="F4F7FA"/>
           </a:solidFill>
           <a:ln w="9525">
             <a:solidFill>
-              <a:srgbClr val="DEE3F0"/>
+              <a:srgbClr val="D8E1EE"/>
             </a:solidFill>
           </a:ln>
           <a:effectLst/>
@@ -17950,7 +17950,7 @@
             <a:r>
               <a:rPr sz="2475" b="1">
                 <a:solidFill>
-                  <a:srgbClr val="2457D6"/>
+                  <a:srgbClr val="1E7F5B"/>
                 </a:solidFill>
                 <a:latin typeface="Pretendard"/>
                 <a:ea typeface="Pretendard"/>
@@ -17991,7 +17991,7 @@
             <a:r>
               <a:rPr sz="2475" b="1">
                 <a:solidFill>
-                  <a:srgbClr val="1E2A6E"/>
+                  <a:srgbClr val="1E3E69"/>
                 </a:solidFill>
                 <a:latin typeface="Pretendard"/>
                 <a:ea typeface="Pretendard"/>
@@ -18017,7 +18017,7 @@
             <a:avLst/>
           </a:prstGeom>
           <a:solidFill>
-            <a:srgbClr val="2457D6"/>
+            <a:srgbClr val="1E7F5B"/>
           </a:solidFill>
           <a:ln>
             <a:noFill/>
@@ -18062,7 +18062,7 @@
             <a:r>
               <a:rPr sz="1800" b="1" spc="140">
                 <a:solidFill>
-                  <a:srgbClr val="2457D6"/>
+                  <a:srgbClr val="1E7F5B"/>
                 </a:solidFill>
                 <a:latin typeface="Pretendard"/>
                 <a:ea typeface="Pretendard"/>
@@ -18103,7 +18103,7 @@
             <a:r>
               <a:rPr sz="2400" b="1">
                 <a:solidFill>
-                  <a:srgbClr val="1E2A6E"/>
+                  <a:srgbClr val="1E3E69"/>
                 </a:solidFill>
                 <a:latin typeface="Pretendard"/>
                 <a:ea typeface="Pretendard"/>
@@ -18147,7 +18147,7 @@
             <a:avLst/>
           </a:prstGeom>
           <a:solidFill>
-            <a:srgbClr val="F4F6FC"/>
+            <a:srgbClr val="F3F8F6"/>
           </a:solidFill>
           <a:ln>
             <a:noFill/>
@@ -18207,7 +18207,7 @@
             <a:avLst/>
           </a:prstGeom>
           <a:solidFill>
-            <a:srgbClr val="F8F8FA"/>
+            <a:srgbClr val="F8F9FA"/>
           </a:solidFill>
           <a:ln>
             <a:noFill/>
@@ -18252,7 +18252,7 @@
             <a:r>
               <a:rPr sz="1950" b="1" spc="160">
                 <a:solidFill>
-                  <a:srgbClr val="2457D6"/>
+                  <a:srgbClr val="1E7F5B"/>
                 </a:solidFill>
                 <a:latin typeface="Pretendard"/>
                 <a:ea typeface="Pretendard"/>
@@ -18293,7 +18293,7 @@
             <a:r>
               <a:rPr sz="5100" b="1">
                 <a:solidFill>
-                  <a:srgbClr val="1E2A6E"/>
+                  <a:srgbClr val="1E3E69"/>
                 </a:solidFill>
                 <a:latin typeface="Pretendard"/>
                 <a:ea typeface="Pretendard"/>
@@ -18319,7 +18319,7 @@
             <a:avLst/>
           </a:prstGeom>
           <a:solidFill>
-            <a:srgbClr val="1E2A6E"/>
+            <a:srgbClr val="1E3E69"/>
           </a:solidFill>
           <a:ln>
             <a:noFill/>
@@ -18351,11 +18351,11 @@
             </a:avLst>
           </a:prstGeom>
           <a:solidFill>
-            <a:srgbClr val="F6F8FD"/>
+            <a:srgbClr val="F4F7FA"/>
           </a:solidFill>
           <a:ln w="9525">
             <a:solidFill>
-              <a:srgbClr val="DEE3F0"/>
+              <a:srgbClr val="D8E1EE"/>
             </a:solidFill>
           </a:ln>
           <a:effectLst/>
@@ -18383,7 +18383,7 @@
             <a:avLst/>
           </a:prstGeom>
           <a:solidFill>
-            <a:srgbClr val="2457D6"/>
+            <a:srgbClr val="1E7F5B"/>
           </a:solidFill>
           <a:ln>
             <a:noFill/>
@@ -18469,7 +18469,7 @@
             <a:r>
               <a:rPr sz="3150" b="1">
                 <a:solidFill>
-                  <a:srgbClr val="1E2A6E"/>
+                  <a:srgbClr val="1E3E69"/>
                 </a:solidFill>
                 <a:latin typeface="Pretendard"/>
                 <a:ea typeface="Pretendard"/>
@@ -18536,11 +18536,11 @@
             </a:avLst>
           </a:prstGeom>
           <a:solidFill>
-            <a:srgbClr val="F6F8FD"/>
+            <a:srgbClr val="F4F7FA"/>
           </a:solidFill>
           <a:ln w="9525">
             <a:solidFill>
-              <a:srgbClr val="DEE3F0"/>
+              <a:srgbClr val="D8E1EE"/>
             </a:solidFill>
           </a:ln>
           <a:effectLst/>
@@ -18568,7 +18568,7 @@
             <a:avLst/>
           </a:prstGeom>
           <a:solidFill>
-            <a:srgbClr val="2457D6"/>
+            <a:srgbClr val="1E7F5B"/>
           </a:solidFill>
           <a:ln>
             <a:noFill/>
@@ -18654,7 +18654,7 @@
             <a:r>
               <a:rPr sz="3150" b="1">
                 <a:solidFill>
-                  <a:srgbClr val="1E2A6E"/>
+                  <a:srgbClr val="1E3E69"/>
                 </a:solidFill>
                 <a:latin typeface="Pretendard"/>
                 <a:ea typeface="Pretendard"/>
@@ -18721,11 +18721,11 @@
             </a:avLst>
           </a:prstGeom>
           <a:solidFill>
-            <a:srgbClr val="F6F8FD"/>
+            <a:srgbClr val="F4F7FA"/>
           </a:solidFill>
           <a:ln w="9525">
             <a:solidFill>
-              <a:srgbClr val="DEE3F0"/>
+              <a:srgbClr val="D8E1EE"/>
             </a:solidFill>
           </a:ln>
           <a:effectLst/>
@@ -18753,7 +18753,7 @@
             <a:avLst/>
           </a:prstGeom>
           <a:solidFill>
-            <a:srgbClr val="2457D6"/>
+            <a:srgbClr val="1E7F5B"/>
           </a:solidFill>
           <a:ln>
             <a:noFill/>
@@ -18839,7 +18839,7 @@
             <a:r>
               <a:rPr sz="3150" b="1">
                 <a:solidFill>
-                  <a:srgbClr val="1E2A6E"/>
+                  <a:srgbClr val="1E3E69"/>
                 </a:solidFill>
                 <a:latin typeface="Pretendard"/>
                 <a:ea typeface="Pretendard"/>
@@ -18904,7 +18904,7 @@
             <a:avLst/>
           </a:prstGeom>
           <a:solidFill>
-            <a:srgbClr val="DEE3F0"/>
+            <a:srgbClr val="D8E1EE"/>
           </a:solidFill>
           <a:ln>
             <a:noFill/>
@@ -19034,7 +19034,7 @@
             <a:avLst/>
           </a:prstGeom>
           <a:solidFill>
-            <a:srgbClr val="F4F6FC"/>
+            <a:srgbClr val="F3F8F6"/>
           </a:solidFill>
           <a:ln>
             <a:noFill/>
@@ -19064,7 +19064,7 @@
             <a:avLst/>
           </a:prstGeom>
           <a:solidFill>
-            <a:srgbClr val="F6F6F9"/>
+            <a:srgbClr val="F6F7F9"/>
           </a:solidFill>
           <a:ln>
             <a:noFill/>
@@ -19094,7 +19094,7 @@
             <a:avLst/>
           </a:prstGeom>
           <a:solidFill>
-            <a:srgbClr val="1E2A6E"/>
+            <a:srgbClr val="1E3E69"/>
           </a:solidFill>
           <a:ln>
             <a:noFill/>
@@ -19139,7 +19139,7 @@
             <a:r>
               <a:rPr sz="2400" b="1">
                 <a:solidFill>
-                  <a:srgbClr val="2457D6"/>
+                  <a:srgbClr val="1E7F5B"/>
                 </a:solidFill>
                 <a:latin typeface="Pretendard"/>
                 <a:ea typeface="Pretendard"/>
@@ -19180,7 +19180,7 @@
             <a:r>
               <a:rPr sz="6600" b="1">
                 <a:solidFill>
-                  <a:srgbClr val="1E2A6E"/>
+                  <a:srgbClr val="1E3E69"/>
                 </a:solidFill>
                 <a:latin typeface="Pretendard"/>
                 <a:ea typeface="Pretendard"/>
@@ -19247,7 +19247,7 @@
             <a:avLst/>
           </a:prstGeom>
           <a:solidFill>
-            <a:srgbClr val="DEE3F0"/>
+            <a:srgbClr val="D8E1EE"/>
           </a:solidFill>
           <a:ln>
             <a:noFill/>
@@ -19377,7 +19377,7 @@
             <a:avLst/>
           </a:prstGeom>
           <a:solidFill>
-            <a:srgbClr val="F4F6FC"/>
+            <a:srgbClr val="F3F8F6"/>
           </a:solidFill>
           <a:ln>
             <a:noFill/>
@@ -19437,7 +19437,7 @@
             <a:avLst/>
           </a:prstGeom>
           <a:solidFill>
-            <a:srgbClr val="F8F8FA"/>
+            <a:srgbClr val="F8F9FA"/>
           </a:solidFill>
           <a:ln>
             <a:noFill/>
@@ -19482,7 +19482,7 @@
             <a:r>
               <a:rPr sz="1950" b="1" spc="160">
                 <a:solidFill>
-                  <a:srgbClr val="2457D6"/>
+                  <a:srgbClr val="1E7F5B"/>
                 </a:solidFill>
                 <a:latin typeface="Pretendard"/>
                 <a:ea typeface="Pretendard"/>
@@ -19523,7 +19523,7 @@
             <a:r>
               <a:rPr sz="5100" b="1">
                 <a:solidFill>
-                  <a:srgbClr val="1E2A6E"/>
+                  <a:srgbClr val="1E3E69"/>
                 </a:solidFill>
                 <a:latin typeface="Pretendard"/>
                 <a:ea typeface="Pretendard"/>
@@ -19549,7 +19549,7 @@
             <a:avLst/>
           </a:prstGeom>
           <a:solidFill>
-            <a:srgbClr val="1E2A6E"/>
+            <a:srgbClr val="1E3E69"/>
           </a:solidFill>
           <a:ln>
             <a:noFill/>
@@ -19622,11 +19622,11 @@
             </a:avLst>
           </a:prstGeom>
           <a:solidFill>
-            <a:srgbClr val="F6F8FD"/>
+            <a:srgbClr val="F4F7FA"/>
           </a:solidFill>
           <a:ln w="9525">
             <a:solidFill>
-              <a:srgbClr val="DEE3F0"/>
+              <a:srgbClr val="D8E1EE"/>
             </a:solidFill>
           </a:ln>
           <a:effectLst/>
@@ -19654,7 +19654,7 @@
             <a:avLst/>
           </a:prstGeom>
           <a:solidFill>
-            <a:srgbClr val="1E2A6E"/>
+            <a:srgbClr val="1E3E69"/>
           </a:solidFill>
           <a:ln>
             <a:noFill/>
@@ -19786,11 +19786,11 @@
             </a:avLst>
           </a:prstGeom>
           <a:solidFill>
-            <a:srgbClr val="F6F8FD"/>
+            <a:srgbClr val="F4F7FA"/>
           </a:solidFill>
           <a:ln w="9525">
             <a:solidFill>
-              <a:srgbClr val="DEE3F0"/>
+              <a:srgbClr val="D8E1EE"/>
             </a:solidFill>
           </a:ln>
           <a:effectLst/>
@@ -19818,7 +19818,7 @@
             <a:avLst/>
           </a:prstGeom>
           <a:solidFill>
-            <a:srgbClr val="2457D6"/>
+            <a:srgbClr val="1E7F5B"/>
           </a:solidFill>
           <a:ln>
             <a:noFill/>
@@ -19950,11 +19950,11 @@
             </a:avLst>
           </a:prstGeom>
           <a:solidFill>
-            <a:srgbClr val="F6F8FD"/>
+            <a:srgbClr val="F4F7FA"/>
           </a:solidFill>
           <a:ln w="9525">
             <a:solidFill>
-              <a:srgbClr val="DEE3F0"/>
+              <a:srgbClr val="D8E1EE"/>
             </a:solidFill>
           </a:ln>
           <a:effectLst/>
@@ -19982,7 +19982,7 @@
             <a:avLst/>
           </a:prstGeom>
           <a:solidFill>
-            <a:srgbClr val="1E2A6E"/>
+            <a:srgbClr val="1E3E69"/>
           </a:solidFill>
           <a:ln>
             <a:noFill/>
@@ -20114,11 +20114,11 @@
             </a:avLst>
           </a:prstGeom>
           <a:solidFill>
-            <a:srgbClr val="F6F8FD"/>
+            <a:srgbClr val="F4F7FA"/>
           </a:solidFill>
           <a:ln w="9525">
             <a:solidFill>
-              <a:srgbClr val="DEE3F0"/>
+              <a:srgbClr val="D8E1EE"/>
             </a:solidFill>
           </a:ln>
           <a:effectLst/>
@@ -20146,7 +20146,7 @@
             <a:avLst/>
           </a:prstGeom>
           <a:solidFill>
-            <a:srgbClr val="2457D6"/>
+            <a:srgbClr val="1E7F5B"/>
           </a:solidFill>
           <a:ln>
             <a:noFill/>
@@ -20276,7 +20276,7 @@
             <a:avLst/>
           </a:prstGeom>
           <a:solidFill>
-            <a:srgbClr val="DEE3F0"/>
+            <a:srgbClr val="D8E1EE"/>
           </a:solidFill>
           <a:ln>
             <a:noFill/>
@@ -20406,7 +20406,7 @@
             <a:avLst/>
           </a:prstGeom>
           <a:solidFill>
-            <a:srgbClr val="F4F6FC"/>
+            <a:srgbClr val="F3F8F6"/>
           </a:solidFill>
           <a:ln>
             <a:noFill/>
@@ -20466,7 +20466,7 @@
             <a:avLst/>
           </a:prstGeom>
           <a:solidFill>
-            <a:srgbClr val="F8F8FA"/>
+            <a:srgbClr val="F8F9FA"/>
           </a:solidFill>
           <a:ln>
             <a:noFill/>
@@ -20498,7 +20498,7 @@
             </a:avLst>
           </a:prstGeom>
           <a:solidFill>
-            <a:srgbClr val="2457D6"/>
+            <a:srgbClr val="1E7F5B"/>
           </a:solidFill>
           <a:ln>
             <a:noFill/>
@@ -20614,7 +20614,7 @@
             <a:r>
               <a:rPr sz="1950" b="1" spc="160">
                 <a:solidFill>
-                  <a:srgbClr val="2457D6"/>
+                  <a:srgbClr val="1E7F5B"/>
                 </a:solidFill>
                 <a:latin typeface="Pretendard"/>
                 <a:ea typeface="Pretendard"/>
@@ -20655,7 +20655,7 @@
             <a:r>
               <a:rPr sz="5100" b="1">
                 <a:solidFill>
-                  <a:srgbClr val="1E2A6E"/>
+                  <a:srgbClr val="1E3E69"/>
                 </a:solidFill>
                 <a:latin typeface="Pretendard"/>
                 <a:ea typeface="Pretendard"/>
@@ -20681,7 +20681,7 @@
             <a:avLst/>
           </a:prstGeom>
           <a:solidFill>
-            <a:srgbClr val="1E2A6E"/>
+            <a:srgbClr val="1E3E69"/>
           </a:solidFill>
           <a:ln>
             <a:noFill/>
@@ -20726,7 +20726,7 @@
             <a:r>
               <a:rPr sz="2250" b="1">
                 <a:solidFill>
-                  <a:srgbClr val="2457D6"/>
+                  <a:srgbClr val="1E7F5B"/>
                 </a:solidFill>
                 <a:latin typeface="Pretendard"/>
                 <a:ea typeface="Pretendard"/>
@@ -20754,11 +20754,11 @@
             </a:avLst>
           </a:prstGeom>
           <a:solidFill>
-            <a:srgbClr val="F6F8FD"/>
+            <a:srgbClr val="F4F7FA"/>
           </a:solidFill>
           <a:ln w="9525">
             <a:solidFill>
-              <a:srgbClr val="DEE3F0"/>
+              <a:srgbClr val="D8E1EE"/>
             </a:solidFill>
           </a:ln>
           <a:effectLst/>
@@ -20786,7 +20786,7 @@
             <a:avLst/>
           </a:prstGeom>
           <a:solidFill>
-            <a:srgbClr val="1E2A6E"/>
+            <a:srgbClr val="1E3E69"/>
           </a:solidFill>
           <a:ln>
             <a:noFill/>
@@ -20872,7 +20872,7 @@
             <a:r>
               <a:rPr sz="2700" b="1">
                 <a:solidFill>
-                  <a:srgbClr val="1E2A6E"/>
+                  <a:srgbClr val="1E3E69"/>
                 </a:solidFill>
                 <a:latin typeface="Pretendard"/>
                 <a:ea typeface="Pretendard"/>
@@ -20898,7 +20898,7 @@
             <a:avLst/>
           </a:prstGeom>
           <a:solidFill>
-            <a:srgbClr val="2457D6"/>
+            <a:srgbClr val="1E7F5B"/>
           </a:solidFill>
           <a:ln>
             <a:noFill/>
@@ -20943,7 +20943,7 @@
             <a:r>
               <a:rPr sz="1875" b="1" spc="150">
                 <a:solidFill>
-                  <a:srgbClr val="2457D6"/>
+                  <a:srgbClr val="1E7F5B"/>
                 </a:solidFill>
                 <a:latin typeface="Pretendard"/>
                 <a:ea typeface="Pretendard"/>
@@ -20984,7 +20984,7 @@
             <a:r>
               <a:rPr sz="2475" b="1">
                 <a:solidFill>
-                  <a:srgbClr val="1E2A6E"/>
+                  <a:srgbClr val="1E3E69"/>
                 </a:solidFill>
                 <a:latin typeface="Pretendard"/>
                 <a:ea typeface="Pretendard"/>
@@ -21010,7 +21010,7 @@
             <a:avLst/>
           </a:prstGeom>
           <a:solidFill>
-            <a:srgbClr val="DEE3F0"/>
+            <a:srgbClr val="D8E1EE"/>
           </a:solidFill>
           <a:ln>
             <a:noFill/>
@@ -21140,7 +21140,7 @@
             <a:avLst/>
           </a:prstGeom>
           <a:solidFill>
-            <a:srgbClr val="F4F6FC"/>
+            <a:srgbClr val="F3F8F6"/>
           </a:solidFill>
           <a:ln>
             <a:noFill/>
@@ -21170,7 +21170,7 @@
             <a:avLst/>
           </a:prstGeom>
           <a:solidFill>
-            <a:srgbClr val="F6F6F9"/>
+            <a:srgbClr val="F6F7F9"/>
           </a:solidFill>
           <a:ln>
             <a:noFill/>
@@ -21200,7 +21200,7 @@
             <a:avLst/>
           </a:prstGeom>
           <a:solidFill>
-            <a:srgbClr val="1E2A6E"/>
+            <a:srgbClr val="1E3E69"/>
           </a:solidFill>
           <a:ln>
             <a:noFill/>
@@ -21245,7 +21245,7 @@
             <a:r>
               <a:rPr sz="2400" b="1">
                 <a:solidFill>
-                  <a:srgbClr val="2457D6"/>
+                  <a:srgbClr val="1E7F5B"/>
                 </a:solidFill>
                 <a:latin typeface="Pretendard"/>
                 <a:ea typeface="Pretendard"/>
@@ -21286,7 +21286,7 @@
             <a:r>
               <a:rPr sz="6600" b="1">
                 <a:solidFill>
-                  <a:srgbClr val="1E2A6E"/>
+                  <a:srgbClr val="1E3E69"/>
                 </a:solidFill>
                 <a:latin typeface="Pretendard"/>
                 <a:ea typeface="Pretendard"/>
@@ -21353,7 +21353,7 @@
             <a:avLst/>
           </a:prstGeom>
           <a:solidFill>
-            <a:srgbClr val="DEE3F0"/>
+            <a:srgbClr val="D8E1EE"/>
           </a:solidFill>
           <a:ln>
             <a:noFill/>
@@ -21483,7 +21483,7 @@
             <a:avLst/>
           </a:prstGeom>
           <a:solidFill>
-            <a:srgbClr val="F4F6FC"/>
+            <a:srgbClr val="F3F8F6"/>
           </a:solidFill>
           <a:ln>
             <a:noFill/>
@@ -21543,7 +21543,7 @@
             <a:avLst/>
           </a:prstGeom>
           <a:solidFill>
-            <a:srgbClr val="F8F8FA"/>
+            <a:srgbClr val="F8F9FA"/>
           </a:solidFill>
           <a:ln>
             <a:noFill/>
@@ -21588,7 +21588,7 @@
             <a:r>
               <a:rPr sz="1950" b="1" spc="160">
                 <a:solidFill>
-                  <a:srgbClr val="2457D6"/>
+                  <a:srgbClr val="1E7F5B"/>
                 </a:solidFill>
                 <a:latin typeface="Pretendard"/>
                 <a:ea typeface="Pretendard"/>
@@ -21629,7 +21629,7 @@
             <a:r>
               <a:rPr sz="5100" b="1">
                 <a:solidFill>
-                  <a:srgbClr val="1E2A6E"/>
+                  <a:srgbClr val="1E3E69"/>
                 </a:solidFill>
                 <a:latin typeface="Pretendard"/>
                 <a:ea typeface="Pretendard"/>
@@ -21655,7 +21655,7 @@
             <a:avLst/>
           </a:prstGeom>
           <a:solidFill>
-            <a:srgbClr val="1E2A6E"/>
+            <a:srgbClr val="1E3E69"/>
           </a:solidFill>
           <a:ln>
             <a:noFill/>
@@ -21687,7 +21687,7 @@
             </a:avLst>
           </a:prstGeom>
           <a:solidFill>
-            <a:srgbClr val="1E2A6E"/>
+            <a:srgbClr val="1E3E69"/>
           </a:solidFill>
           <a:ln>
             <a:noFill/>
@@ -21764,7 +21764,7 @@
           </a:solidFill>
           <a:ln w="19050">
             <a:solidFill>
-              <a:srgbClr val="DEE3F0"/>
+              <a:srgbClr val="D8E1EE"/>
             </a:solidFill>
           </a:ln>
           <a:effectLst/>
@@ -21792,7 +21792,7 @@
             <a:avLst/>
           </a:prstGeom>
           <a:solidFill>
-            <a:srgbClr val="EAF0FF"/>
+            <a:srgbClr val="E6F4EE"/>
           </a:solidFill>
           <a:ln>
             <a:noFill/>
@@ -21837,7 +21837,7 @@
             <a:r>
               <a:rPr sz="2250" b="1">
                 <a:solidFill>
-                  <a:srgbClr val="2457D6"/>
+                  <a:srgbClr val="1E7F5B"/>
                 </a:solidFill>
                 <a:latin typeface="Pretendard"/>
                 <a:ea typeface="Pretendard"/>
@@ -21878,7 +21878,7 @@
             <a:r>
               <a:rPr sz="2550" b="1">
                 <a:solidFill>
-                  <a:srgbClr val="1E2A6E"/>
+                  <a:srgbClr val="1E3E69"/>
                 </a:solidFill>
                 <a:latin typeface="Pretendard"/>
                 <a:ea typeface="Pretendard"/>
@@ -21910,7 +21910,7 @@
           </a:solidFill>
           <a:ln w="19050">
             <a:solidFill>
-              <a:srgbClr val="DEE3F0"/>
+              <a:srgbClr val="D8E1EE"/>
             </a:solidFill>
           </a:ln>
           <a:effectLst/>
@@ -21938,7 +21938,7 @@
             <a:avLst/>
           </a:prstGeom>
           <a:solidFill>
-            <a:srgbClr val="EAF0FF"/>
+            <a:srgbClr val="E6F4EE"/>
           </a:solidFill>
           <a:ln>
             <a:noFill/>
@@ -21983,7 +21983,7 @@
             <a:r>
               <a:rPr sz="2250" b="1">
                 <a:solidFill>
-                  <a:srgbClr val="2457D6"/>
+                  <a:srgbClr val="1E7F5B"/>
                 </a:solidFill>
                 <a:latin typeface="Pretendard"/>
                 <a:ea typeface="Pretendard"/>
@@ -22024,7 +22024,7 @@
             <a:r>
               <a:rPr sz="2550" b="1">
                 <a:solidFill>
-                  <a:srgbClr val="1E2A6E"/>
+                  <a:srgbClr val="1E3E69"/>
                 </a:solidFill>
                 <a:latin typeface="Pretendard"/>
                 <a:ea typeface="Pretendard"/>
@@ -22056,7 +22056,7 @@
           </a:solidFill>
           <a:ln w="19050">
             <a:solidFill>
-              <a:srgbClr val="DEE3F0"/>
+              <a:srgbClr val="D8E1EE"/>
             </a:solidFill>
           </a:ln>
           <a:effectLst/>
@@ -22084,7 +22084,7 @@
             <a:avLst/>
           </a:prstGeom>
           <a:solidFill>
-            <a:srgbClr val="EAF0FF"/>
+            <a:srgbClr val="E6F4EE"/>
           </a:solidFill>
           <a:ln>
             <a:noFill/>
@@ -22129,7 +22129,7 @@
             <a:r>
               <a:rPr sz="2250" b="1">
                 <a:solidFill>
-                  <a:srgbClr val="2457D6"/>
+                  <a:srgbClr val="1E7F5B"/>
                 </a:solidFill>
                 <a:latin typeface="Pretendard"/>
                 <a:ea typeface="Pretendard"/>
@@ -22170,7 +22170,7 @@
             <a:r>
               <a:rPr sz="2550" b="1">
                 <a:solidFill>
-                  <a:srgbClr val="1E2A6E"/>
+                  <a:srgbClr val="1E3E69"/>
                 </a:solidFill>
                 <a:latin typeface="Pretendard"/>
                 <a:ea typeface="Pretendard"/>
@@ -22202,7 +22202,7 @@
           </a:solidFill>
           <a:ln w="19050">
             <a:solidFill>
-              <a:srgbClr val="DEE3F0"/>
+              <a:srgbClr val="D8E1EE"/>
             </a:solidFill>
           </a:ln>
           <a:effectLst/>
@@ -22230,7 +22230,7 @@
             <a:avLst/>
           </a:prstGeom>
           <a:solidFill>
-            <a:srgbClr val="EAF0FF"/>
+            <a:srgbClr val="E6F4EE"/>
           </a:solidFill>
           <a:ln>
             <a:noFill/>
@@ -22275,7 +22275,7 @@
             <a:r>
               <a:rPr sz="2250" b="1">
                 <a:solidFill>
-                  <a:srgbClr val="2457D6"/>
+                  <a:srgbClr val="1E7F5B"/>
                 </a:solidFill>
                 <a:latin typeface="Pretendard"/>
                 <a:ea typeface="Pretendard"/>
@@ -22316,7 +22316,7 @@
             <a:r>
               <a:rPr sz="2550" b="1">
                 <a:solidFill>
-                  <a:srgbClr val="1E2A6E"/>
+                  <a:srgbClr val="1E3E69"/>
                 </a:solidFill>
                 <a:latin typeface="Pretendard"/>
                 <a:ea typeface="Pretendard"/>
@@ -22342,7 +22342,7 @@
             <a:avLst/>
           </a:prstGeom>
           <a:solidFill>
-            <a:srgbClr val="DEE3F0"/>
+            <a:srgbClr val="D8E1EE"/>
           </a:solidFill>
           <a:ln>
             <a:noFill/>
@@ -22472,7 +22472,7 @@
             <a:avLst/>
           </a:prstGeom>
           <a:solidFill>
-            <a:srgbClr val="F4F6FC"/>
+            <a:srgbClr val="F3F8F6"/>
           </a:solidFill>
           <a:ln>
             <a:noFill/>
@@ -22532,7 +22532,7 @@
             <a:avLst/>
           </a:prstGeom>
           <a:solidFill>
-            <a:srgbClr val="F8F8FA"/>
+            <a:srgbClr val="F8F9FA"/>
           </a:solidFill>
           <a:ln>
             <a:noFill/>
@@ -22577,7 +22577,7 @@
             <a:r>
               <a:rPr sz="1950" b="1" spc="160">
                 <a:solidFill>
-                  <a:srgbClr val="2457D6"/>
+                  <a:srgbClr val="1E7F5B"/>
                 </a:solidFill>
                 <a:latin typeface="Pretendard"/>
                 <a:ea typeface="Pretendard"/>
@@ -22618,7 +22618,7 @@
             <a:r>
               <a:rPr sz="5100" b="1">
                 <a:solidFill>
-                  <a:srgbClr val="1E2A6E"/>
+                  <a:srgbClr val="1E3E69"/>
                 </a:solidFill>
                 <a:latin typeface="Pretendard"/>
                 <a:ea typeface="Pretendard"/>
@@ -22644,7 +22644,7 @@
             <a:avLst/>
           </a:prstGeom>
           <a:solidFill>
-            <a:srgbClr val="1E2A6E"/>
+            <a:srgbClr val="1E3E69"/>
           </a:solidFill>
           <a:ln>
             <a:noFill/>
@@ -22676,7 +22676,7 @@
             </a:avLst>
           </a:prstGeom>
           <a:solidFill>
-            <a:srgbClr val="1E2A6E"/>
+            <a:srgbClr val="1E3E69"/>
           </a:solidFill>
           <a:ln>
             <a:noFill/>
@@ -22721,7 +22721,7 @@
             <a:r>
               <a:rPr sz="1950" b="1" spc="180">
                 <a:solidFill>
-                  <a:srgbClr val="C9D7FF"/>
+                  <a:srgbClr val="C3E6D8"/>
                 </a:solidFill>
                 <a:latin typeface="Pretendard"/>
                 <a:ea typeface="Pretendard"/>
@@ -22790,11 +22790,11 @@
             </a:avLst>
           </a:prstGeom>
           <a:solidFill>
-            <a:srgbClr val="F6F8FD"/>
+            <a:srgbClr val="F4F7FA"/>
           </a:solidFill>
           <a:ln w="9525">
             <a:solidFill>
-              <a:srgbClr val="DEE3F0"/>
+              <a:srgbClr val="D8E1EE"/>
             </a:solidFill>
           </a:ln>
           <a:effectLst/>
@@ -22822,7 +22822,7 @@
             <a:avLst/>
           </a:prstGeom>
           <a:solidFill>
-            <a:srgbClr val="2457D6"/>
+            <a:srgbClr val="1E7F5B"/>
           </a:solidFill>
           <a:ln>
             <a:noFill/>
@@ -22867,7 +22867,7 @@
             <a:r>
               <a:rPr sz="1875" b="1" spc="160">
                 <a:solidFill>
-                  <a:srgbClr val="2457D6"/>
+                  <a:srgbClr val="1E7F5B"/>
                 </a:solidFill>
                 <a:latin typeface="Pretendard"/>
                 <a:ea typeface="Pretendard"/>
@@ -22908,7 +22908,7 @@
             <a:r>
               <a:rPr sz="2550" b="1">
                 <a:solidFill>
-                  <a:srgbClr val="1E2A6E"/>
+                  <a:srgbClr val="1E3E69"/>
                 </a:solidFill>
                 <a:latin typeface="Pretendard"/>
                 <a:ea typeface="Pretendard"/>
@@ -22934,7 +22934,7 @@
             <a:avLst/>
           </a:prstGeom>
           <a:solidFill>
-            <a:srgbClr val="DEE3F0"/>
+            <a:srgbClr val="D8E1EE"/>
           </a:solidFill>
           <a:ln>
             <a:noFill/>
